--- a/protected-downloads/praesentation/TL08.pptx
+++ b/protected-downloads/praesentation/TL08.pptx
@@ -4839,7 +4839,7 @@
                 </a:solidFill>
                 <a:latin typeface="Arial"/>
               </a:rPr>
-              <a:t>v0.2</a:t>
+              <a:t>v1.0</a:t>
             </a:r>
           </a:p>
         </p:txBody>

--- a/protected-downloads/praesentation/TL08.pptx
+++ b/protected-downloads/praesentation/TL08.pptx
@@ -594,17 +594,17 @@
           <a:lstStyle/>
           <a:p>
             <a:r>
-              <a:t>Neue 2er-Gruppen bilden – nicht dieselben Paare wie bei AB-1.</a:t>
-            </a:r>
-          </a:p>
-          <a:p>
-            <a:r>
-              <a:t>Typischer Fehler: Einstiegssatz deutet Lösung bereits an oder lädt eine Partei stärker ein. TN erkennen das selbst im Sprachcheck – lernwirksamer als Trainer-Feedback.</a:t>
-            </a:r>
-          </a:p>
-          <a:p>
-            <a:r>
-              <a:t>Allparteilich heißt nicht meinungslos – es heißt: Meinung hat im Gespräch keinen Raum.</a:t>
+              <a:t>Selbstcheck (Sec 5) in Stille ausfüllen (ca. 3 Min.).</a:t>
+            </a:r>
+          </a:p>
+          <a:p>
+            <a:r>
+              <a:t>Jeden TN seinen nächsten Schritt mit konkretem Datum benennen lassen – soziale Verbindlichkeit erhöhen.</a:t>
+            </a:r>
+          </a:p>
+          <a:p>
+            <a:r>
+              <a:t>Feedbackbogen L1: 3 Minuten, nicht als Add-on behandeln.</a:t>
             </a:r>
           </a:p>
         </p:txBody>
@@ -674,86 +674,6 @@
           <a:lstStyle/>
           <a:p>
             <a:r>
-              <a:t>Selbstcheck (Sec 5) in Stille ausfüllen (ca. 3 Min.).</a:t>
-            </a:r>
-          </a:p>
-          <a:p>
-            <a:r>
-              <a:t>Jeden TN seinen nächsten Schritt mit konkretem Datum benennen lassen – soziale Verbindlichkeit erhöhen.</a:t>
-            </a:r>
-          </a:p>
-          <a:p>
-            <a:r>
-              <a:t>Feedbackbogen L1: 3 Minuten, nicht als Add-on behandeln.</a:t>
-            </a:r>
-          </a:p>
-        </p:txBody>
-      </p:sp>
-      <p:sp>
-        <p:nvSpPr>
-          <p:cNvPr id="4" name="Slide Number Placeholder 3"/>
-          <p:cNvSpPr>
-            <a:spLocks noGrp="1"/>
-          </p:cNvSpPr>
-          <p:nvPr>
-            <p:ph type="sldNum" idx="5" sz="quarter"/>
-          </p:nvPr>
-        </p:nvSpPr>
-        <p:spPr/>
-      </p:sp>
-    </p:spTree>
-  </p:cSld>
-  <p:clrMapOvr>
-    <a:masterClrMapping/>
-  </p:clrMapOvr>
-</p:notes>
-</file>
-
-<file path=ppt/notesSlides/notesSlide12.xml><?xml version="1.0" encoding="utf-8"?>
-<p:notes xmlns:a="http://schemas.openxmlformats.org/drawingml/2006/main" xmlns:p="http://schemas.openxmlformats.org/presentationml/2006/main" xmlns:r="http://schemas.openxmlformats.org/officeDocument/2006/relationships">
-  <p:cSld>
-    <p:spTree>
-      <p:nvGrpSpPr>
-        <p:cNvPr id="1" name=""/>
-        <p:cNvGrpSpPr/>
-        <p:nvPr/>
-      </p:nvGrpSpPr>
-      <p:grpSpPr>
-        <a:xfrm>
-          <a:off x="0" y="0"/>
-          <a:ext cx="0" cy="0"/>
-          <a:chOff x="0" y="0"/>
-          <a:chExt cx="0" cy="0"/>
-        </a:xfrm>
-      </p:grpSpPr>
-      <p:sp>
-        <p:nvSpPr>
-          <p:cNvPr id="2" name="Slide Image Placeholder 1"/>
-          <p:cNvSpPr>
-            <a:spLocks noGrp="1"/>
-          </p:cNvSpPr>
-          <p:nvPr>
-            <p:ph type="sldImg" idx="2"/>
-          </p:nvPr>
-        </p:nvSpPr>
-        <p:spPr/>
-      </p:sp>
-      <p:sp>
-        <p:nvSpPr>
-          <p:cNvPr id="3" name="Notes Placeholder 2"/>
-          <p:cNvSpPr>
-            <a:spLocks noGrp="1"/>
-          </p:cNvSpPr>
-          <p:nvPr>
-            <p:ph type="body" idx="3" sz="quarter"/>
-          </p:nvPr>
-        </p:nvSpPr>
-        <p:spPr/>
-        <p:txBody>
-          <a:bodyPr/>
-          <a:lstStyle/>
-          <a:p>
-            <a:r>
               <a:t>Greenleaf-Test vorlesen: „Wachsen die Menschen, denen Sie führend begegnen – werden sie kompetenter, freier, eigenverantwortlicher?“</a:t>
             </a:r>
           </a:p>
@@ -834,7 +754,17 @@
           <a:lstStyle/>
           <a:p>
             <a:r>
-              <a:t>Siehe Trainerhandbuch (Sektion 3) für Moderationshinweise, Timing und erwartete Teilnehmerreaktionen.</a:t>
+              <a:t>Einstiegsrunde aufgreifen (0–15 Min.): Welches Gespräch in den letzten drei Monaten hat die meiste Überwindung gekostet? Stichworte auf Flipchart (ohne Namen).</a:t>
+            </a:r>
+          </a:p>
+          <a:p>
+            <a:r>
+              <a:t>Explizit benennen: TL08 beginnt dort, wo TL06 endete – nach dem zweiten Nachfassgespräch ohne Wirkung, und wenn ein Konflikt zwischen Beratern eskaliert.</a:t>
+            </a:r>
+          </a:p>
+          <a:p>
+            <a:r>
+              <a:t>Merksatz Flipchart: Das Nicht-Gespräch kostet mehr als das unbequeme Gespräch.</a:t>
             </a:r>
           </a:p>
         </p:txBody>
@@ -904,17 +834,17 @@
           <a:lstStyle/>
           <a:p>
             <a:r>
-              <a:t>Einstiegsrunde aufgreifen (0–15 Min.): Welches Gespräch in den letzten drei Monaten hat die meiste Überwindung gekostet? Stichworte auf Flipchart (ohne Namen).</a:t>
-            </a:r>
-          </a:p>
-          <a:p>
-            <a:r>
-              <a:t>Explizit benennen: TL08 beginnt dort, wo TL06 endete – nach dem zweiten Nachfassgespräch ohne Wirkung, und wenn ein Konflikt zwischen Beratern eskaliert.</a:t>
-            </a:r>
-          </a:p>
-          <a:p>
-            <a:r>
-              <a:t>Merksatz Flipchart: Das Nicht-Gespräch kostet mehr als das unbequeme Gespräch.</a:t>
+              <a:t>Satz als Auslöser: „Du hast die vereinbarte Dokumentation wieder nicht abgegeben.</a:t>
+            </a:r>
+          </a:p>
+          <a:p>
+            <a:r>
+              <a:t>Frage an TN: Auf welcher Ebene hören Ihre Berater voraussichtlich zuerst – und wie verändert das Ihre Formulierung?</a:t>
+            </a:r>
+          </a:p>
+          <a:p>
+            <a:r>
+              <a:t>Überleitung: Das Vier-Ohren-Modell kennen alle aus TL00 – heute geht es darum, die Empfangsebene vorab zu antizipieren.</a:t>
             </a:r>
           </a:p>
         </p:txBody>
@@ -984,17 +914,17 @@
           <a:lstStyle/>
           <a:p>
             <a:r>
-              <a:t>Satz als Auslöser: „Du hast die vereinbarte Dokumentation wieder nicht abgegeben.</a:t>
-            </a:r>
-          </a:p>
-          <a:p>
-            <a:r>
-              <a:t>Frage an TN: Auf welcher Ebene hören Ihre Berater voraussichtlich zuerst – und wie verändert das Ihre Formulierung?</a:t>
-            </a:r>
-          </a:p>
-          <a:p>
-            <a:r>
-              <a:t>Überleitung: Das Vier-Ohren-Modell kennen alle aus TL00 – heute geht es darum, die Empfangsebene vorab zu antizipieren.</a:t>
+              <a:t>Stone, Patton &amp; Heen (1999): Drei-Ebenen-Modell – neues Element gegenüber TL00.</a:t>
+            </a:r>
+          </a:p>
+          <a:p>
+            <a:r>
+              <a:t>Einzelreflexion danach (10 Min.) zu den drei inneren Klärungsfragen in der TN-Unterlage – kein Gruppen-Sharing.</a:t>
+            </a:r>
+          </a:p>
+          <a:p>
+            <a:r>
+              <a:t>Tandem-Austausch (5 Min.) danach ist freiwillig.</a:t>
             </a:r>
           </a:p>
         </p:txBody>
@@ -1064,17 +994,17 @@
           <a:lstStyle/>
           <a:p>
             <a:r>
-              <a:t>Stone, Patton &amp; Heen (1999): Drei-Ebenen-Modell – neues Element gegenüber TL00.</a:t>
-            </a:r>
-          </a:p>
-          <a:p>
-            <a:r>
-              <a:t>Einzelreflexion danach (10 Min.) zu den drei inneren Klärungsfragen in der TN-Unterlage – kein Gruppen-Sharing.</a:t>
-            </a:r>
-          </a:p>
-          <a:p>
-            <a:r>
-              <a:t>Tandem-Austausch (5 Min.) danach ist freiwillig.</a:t>
+              <a:t>Häufige Reaktion: TN verbinden Konsequenzgespräch sofort mit Abmahnung – früh begegnen.</a:t>
+            </a:r>
+          </a:p>
+          <a:p>
+            <a:r>
+              <a:t>Stufengrafik auf Flipchart: Entwicklungsgespräch → Nachfassgespräch → Konsequenzgespräch → HR. HR kommt erst auf Stufe 4.</a:t>
+            </a:r>
+          </a:p>
+          <a:p>
+            <a:r>
+              <a:t>Häufigster Fehler: Konsequenz wird bereits in Schritt 1 (Sachverhalt) formuliert – das macht das Gespräch zum Verhör.</a:t>
             </a:r>
           </a:p>
         </p:txBody>
@@ -1144,17 +1074,17 @@
           <a:lstStyle/>
           <a:p>
             <a:r>
-              <a:t>Häufige Reaktion: TN verbinden Konsequenzgespräch sofort mit Abmahnung – früh begegnen.</a:t>
-            </a:r>
-          </a:p>
-          <a:p>
-            <a:r>
-              <a:t>Stufengrafik auf Flipchart: Entwicklungsgespräch → Nachfassgespräch → Konsequenzgespräch → HR. HR kommt erst auf Stufe 4.</a:t>
-            </a:r>
-          </a:p>
-          <a:p>
-            <a:r>
-              <a:t>Häufigster Fehler: Konsequenz wird bereits in Schritt 1 (Sachverhalt) formuliert – das macht das Gespräch zum Verhör.</a:t>
+              <a:t>Greenleaf (1977): Wer Vereinbarungen nicht verbindlich macht, entmündigt den Mitarbeitenden.</a:t>
+            </a:r>
+          </a:p>
+          <a:p>
+            <a:r>
+              <a:t>Eignungsfrage-Signale benennen: (1) Mitarbeitender will nicht – explizit oder implizit. (2) Muster ist breiter als ein Bereich.</a:t>
+            </a:r>
+          </a:p>
+          <a:p>
+            <a:r>
+              <a:t>Schriftliche Dokumentation = Führungsgedächtnis, keine Abmahnvorstufe. Bereichsdirektor noch in derselben Woche informieren.</a:t>
             </a:r>
           </a:p>
         </p:txBody>
@@ -1224,17 +1154,17 @@
           <a:lstStyle/>
           <a:p>
             <a:r>
-              <a:t>Greenleaf (1977): Wer Vereinbarungen nicht verbindlich macht, entmündigt den Mitarbeitenden.</a:t>
-            </a:r>
-          </a:p>
-          <a:p>
-            <a:r>
-              <a:t>Eignungsfrage-Signale benennen: (1) Mitarbeitender will nicht – explizit oder implizit. (2) Muster ist breiter als ein Bereich.</a:t>
-            </a:r>
-          </a:p>
-          <a:p>
-            <a:r>
-              <a:t>Schriftliche Dokumentation = Führungsgedächtnis, keine Abmahnvorstufe. Bereichsdirektor noch in derselben Woche informieren.</a:t>
+              <a:t>Sprachcheck in 2er-Gruppen (kein Rollenspiel): Einstiegssatz vorlesen, Rückmeldung auf zwei Fragen – benennt oder beschönigt der Satz den Sachverhalt? Lädt er ein oder klagt er an?</a:t>
+            </a:r>
+          </a:p>
+          <a:p>
+            <a:r>
+              <a:t>Häufigster Fehler beim Rundgang: Konsequenz erscheint in Schritt 1. Diskret ansprechen oder als geteilten Lernpunkt im Plenum benennen (ohne Namen).</a:t>
+            </a:r>
+          </a:p>
+          <a:p>
+            <a:r>
+              <a:t>Eigener Fall oder Fallszenario Felix (abgeglichenes TN-Unterlage-Szenario) – beides gilt.</a:t>
             </a:r>
           </a:p>
         </p:txBody>
@@ -1304,17 +1234,17 @@
           <a:lstStyle/>
           <a:p>
             <a:r>
-              <a:t>Sprachcheck in 2er-Gruppen (kein Rollenspiel): Einstiegssatz vorlesen, Rückmeldung auf zwei Fragen – benennt oder beschönigt der Satz den Sachverhalt? Lädt er ein oder klagt er an?</a:t>
-            </a:r>
-          </a:p>
-          <a:p>
-            <a:r>
-              <a:t>Häufigster Fehler beim Rundgang: Konsequenz erscheint in Schritt 1. Diskret ansprechen oder als geteilten Lernpunkt im Plenum benennen (ohne Namen).</a:t>
-            </a:r>
-          </a:p>
-          <a:p>
-            <a:r>
-              <a:t>Eigener Fall oder Fallszenario Felix (abgeglichenes TN-Unterlage-Szenario) – beides gilt.</a:t>
+              <a:t>Im FK-Geschäft von VR-Banken: Rollenkonflikte besonders häufig – Provisionsregelungen, Bestandsübergaben ohne klare Dokumentation.</a:t>
+            </a:r>
+          </a:p>
+          <a:p>
+            <a:r>
+              <a:t>Kernaussage: Allparteiliche Moderation löst keinen Rollenkonflikt, solange die strukturelle Regelung ungeklärt ist.</a:t>
+            </a:r>
+          </a:p>
+          <a:p>
+            <a:r>
+              <a:t>Überleitung zum Praxisfall: Monika und der Brenner-Konflikt.</a:t>
             </a:r>
           </a:p>
         </p:txBody>
@@ -1384,17 +1314,17 @@
           <a:lstStyle/>
           <a:p>
             <a:r>
-              <a:t>Im FK-Geschäft von VR-Banken: Rollenkonflikte besonders häufig – Provisionsregelungen, Bestandsübergaben ohne klare Dokumentation.</a:t>
-            </a:r>
-          </a:p>
-          <a:p>
-            <a:r>
-              <a:t>Kernaussage: Allparteiliche Moderation löst keinen Rollenkonflikt, solange die strukturelle Regelung ungeklärt ist.</a:t>
-            </a:r>
-          </a:p>
-          <a:p>
-            <a:r>
-              <a:t>Überleitung zum Praxisfall: Monika und der Brenner-Konflikt.</a:t>
+              <a:t>Neue 2er-Gruppen bilden – nicht dieselben Paare wie bei AB-1.</a:t>
+            </a:r>
+          </a:p>
+          <a:p>
+            <a:r>
+              <a:t>Typischer Fehler: Einstiegssatz deutet Lösung bereits an oder lädt eine Partei stärker ein. TN erkennen das selbst im Sprachcheck – lernwirksamer als Trainer-Feedback.</a:t>
+            </a:r>
+          </a:p>
+          <a:p>
+            <a:r>
+              <a:t>Allparteilich heißt nicht meinungslos – es heißt: Meinung hat im Gespräch keinen Raum.</a:t>
             </a:r>
           </a:p>
         </p:txBody>
@@ -11598,7 +11528,7 @@
             <a:avLst/>
           </a:prstGeom>
           <a:solidFill>
-            <a:srgbClr val="EDEDF3"/>
+            <a:srgbClr val="1F2C56"/>
           </a:solidFill>
           <a:ln>
             <a:noFill/>
@@ -11634,129 +11564,8 @@
         </p:nvSpPr>
         <p:spPr>
           <a:xfrm>
-            <a:off x="0" y="0"/>
-            <a:ext cx="12188952" cy="50292"/>
-          </a:xfrm>
-          <a:prstGeom prst="rect">
-            <a:avLst/>
-          </a:prstGeom>
-          <a:solidFill>
-            <a:srgbClr val="1F2C56"/>
-          </a:solidFill>
-          <a:ln>
-            <a:noFill/>
-          </a:ln>
-        </p:spPr>
-        <p:style>
-          <a:lnRef idx="1">
-            <a:schemeClr val="accent1"/>
-          </a:lnRef>
-          <a:fillRef idx="3">
-            <a:schemeClr val="accent1"/>
-          </a:fillRef>
-          <a:effectRef idx="2">
-            <a:schemeClr val="accent1"/>
-          </a:effectRef>
-          <a:fontRef idx="minor">
-            <a:schemeClr val="lt1"/>
-          </a:fontRef>
-        </p:style>
-        <p:txBody>
-          <a:bodyPr rtlCol="0" anchor="ctr"/>
-          <a:lstStyle/>
-          <a:p>
-            <a:pPr algn="ctr"/>
-          </a:p>
-        </p:txBody>
-      </p:sp>
-      <p:sp>
-        <p:nvSpPr>
-          <p:cNvPr id="4" name="TextBox 3"/>
-          <p:cNvSpPr txBox="1"/>
-          <p:nvPr/>
-        </p:nvSpPr>
-        <p:spPr>
-          <a:xfrm>
-            <a:off x="685800" y="109728"/>
-            <a:ext cx="10817352" cy="228600"/>
-          </a:xfrm>
-          <a:prstGeom prst="rect">
-            <a:avLst/>
-          </a:prstGeom>
-          <a:noFill/>
-        </p:spPr>
-        <p:txBody>
-          <a:bodyPr wrap="none">
-            <a:spAutoFit/>
-          </a:bodyPr>
-          <a:lstStyle/>
-          <a:p>
-            <a:pPr algn="l"/>
-            <a:r>
-              <a:rPr sz="750">
-                <a:solidFill>
-                  <a:srgbClr val="78808C"/>
-                </a:solidFill>
-                <a:latin typeface="Consolas"/>
-              </a:rPr>
-              <a:t>TL08  ·  INHALT</a:t>
-            </a:r>
-          </a:p>
-        </p:txBody>
-      </p:sp>
-      <p:sp>
-        <p:nvSpPr>
-          <p:cNvPr id="5" name="Rectangle 4"/>
-          <p:cNvSpPr/>
-          <p:nvPr/>
-        </p:nvSpPr>
-        <p:spPr>
-          <a:xfrm>
-            <a:off x="0" y="1234440"/>
-            <a:ext cx="12188952" cy="12700"/>
-          </a:xfrm>
-          <a:prstGeom prst="rect">
-            <a:avLst/>
-          </a:prstGeom>
-          <a:solidFill>
-            <a:srgbClr val="D8DFE4"/>
-          </a:solidFill>
-          <a:ln>
-            <a:noFill/>
-          </a:ln>
-        </p:spPr>
-        <p:style>
-          <a:lnRef idx="1">
-            <a:schemeClr val="accent1"/>
-          </a:lnRef>
-          <a:fillRef idx="3">
-            <a:schemeClr val="accent1"/>
-          </a:fillRef>
-          <a:effectRef idx="2">
-            <a:schemeClr val="accent1"/>
-          </a:effectRef>
-          <a:fontRef idx="minor">
-            <a:schemeClr val="lt1"/>
-          </a:fontRef>
-        </p:style>
-        <p:txBody>
-          <a:bodyPr rtlCol="0" anchor="ctr"/>
-          <a:lstStyle/>
-          <a:p>
-            <a:pPr algn="ctr"/>
-          </a:p>
-        </p:txBody>
-      </p:sp>
-      <p:sp>
-        <p:nvSpPr>
-          <p:cNvPr id="6" name="Rectangle 5"/>
-          <p:cNvSpPr/>
-          <p:nvPr/>
-        </p:nvSpPr>
-        <p:spPr>
-          <a:xfrm>
-            <a:off x="685800" y="502920"/>
-            <a:ext cx="36576" cy="658368"/>
+            <a:off x="685800" y="2788920"/>
+            <a:ext cx="548640" cy="38100"/>
           </a:xfrm>
           <a:prstGeom prst="rect">
             <a:avLst/>
@@ -11792,14 +11601,14 @@
       </p:sp>
       <p:sp>
         <p:nvSpPr>
-          <p:cNvPr id="7" name="TextBox 6"/>
+          <p:cNvPr id="4" name="TextBox 3"/>
           <p:cNvSpPr txBox="1"/>
           <p:nvPr/>
         </p:nvSpPr>
         <p:spPr>
           <a:xfrm>
-            <a:off x="813816" y="502920"/>
-            <a:ext cx="10634472" cy="685800"/>
+            <a:off x="685800" y="3017520"/>
+            <a:ext cx="10817352" cy="1463040"/>
           </a:xfrm>
           <a:prstGeom prst="rect">
             <a:avLst/>
@@ -11814,9 +11623,9 @@
           <a:p>
             <a:pPr algn="l"/>
             <a:r>
-              <a:rPr sz="2400" b="1" i="0">
-                <a:solidFill>
-                  <a:srgbClr val="1F2C56"/>
+              <a:rPr sz="4000" b="1" i="0">
+                <a:solidFill>
+                  <a:srgbClr val="FFFFFF"/>
                 </a:solidFill>
                 <a:latin typeface="Arial"/>
               </a:rPr>
@@ -11827,57 +11636,49 @@
       </p:sp>
       <p:sp>
         <p:nvSpPr>
-          <p:cNvPr id="8" name="Rectangle 7"/>
-          <p:cNvSpPr/>
-          <p:nvPr/>
-        </p:nvSpPr>
-        <p:spPr>
-          <a:xfrm>
-            <a:off x="0" y="6510528"/>
-            <a:ext cx="12188952" cy="347472"/>
-          </a:xfrm>
-          <a:prstGeom prst="rect">
-            <a:avLst/>
-          </a:prstGeom>
-          <a:solidFill>
-            <a:srgbClr val="0A1937"/>
-          </a:solidFill>
-          <a:ln>
-            <a:noFill/>
-          </a:ln>
-        </p:spPr>
-        <p:style>
-          <a:lnRef idx="1">
-            <a:schemeClr val="accent1"/>
-          </a:lnRef>
-          <a:fillRef idx="3">
-            <a:schemeClr val="accent1"/>
-          </a:fillRef>
-          <a:effectRef idx="2">
-            <a:schemeClr val="accent1"/>
-          </a:effectRef>
-          <a:fontRef idx="minor">
-            <a:schemeClr val="lt1"/>
-          </a:fontRef>
-        </p:style>
-        <p:txBody>
-          <a:bodyPr rtlCol="0" anchor="ctr"/>
-          <a:lstStyle/>
-          <a:p>
-            <a:pPr algn="ctr"/>
-          </a:p>
-        </p:txBody>
-      </p:sp>
-      <p:sp>
-        <p:nvSpPr>
-          <p:cNvPr id="9" name="TextBox 8"/>
+          <p:cNvPr id="5" name="TextBox 4"/>
           <p:cNvSpPr txBox="1"/>
           <p:nvPr/>
         </p:nvSpPr>
         <p:spPr>
           <a:xfrm>
-            <a:off x="685800" y="6583680"/>
-            <a:ext cx="6490411" cy="256032"/>
+            <a:off x="685800" y="4480560"/>
+            <a:ext cx="8653881" cy="1280160"/>
+          </a:xfrm>
+          <a:prstGeom prst="rect">
+            <a:avLst/>
+          </a:prstGeom>
+          <a:noFill/>
+        </p:spPr>
+        <p:txBody>
+          <a:bodyPr wrap="square">
+            <a:spAutoFit/>
+          </a:bodyPr>
+          <a:lstStyle/>
+          <a:p>
+            <a:pPr algn="l"/>
+            <a:r>
+              <a:rPr sz="1600" b="0" i="0">
+                <a:solidFill>
+                  <a:srgbClr val="C8D2E6"/>
+                </a:solidFill>
+                <a:latin typeface="Arial"/>
+              </a:rPr>
+              <a:t>Nicht der Inhalt – die Antizipation</a:t>
+            </a:r>
+          </a:p>
+        </p:txBody>
+      </p:sp>
+      <p:sp>
+        <p:nvSpPr>
+          <p:cNvPr id="6" name="TextBox 5"/>
+          <p:cNvSpPr txBox="1"/>
+          <p:nvPr/>
+        </p:nvSpPr>
+        <p:spPr>
+          <a:xfrm>
+            <a:off x="685800" y="6355080"/>
+            <a:ext cx="10817352" cy="274320"/>
           </a:xfrm>
           <a:prstGeom prst="rect">
             <a:avLst/>
@@ -11894,7 +11695,7 @@
             <a:r>
               <a:rPr sz="700">
                 <a:solidFill>
-                  <a:srgbClr val="A0B4D2"/>
+                  <a:srgbClr val="8CA0C3"/>
                 </a:solidFill>
                 <a:latin typeface="Consolas"/>
               </a:rPr>

--- a/protected-downloads/praesentation/TL08.pptx
+++ b/protected-downloads/praesentation/TL08.pptx
@@ -28,6 +28,7 @@
     <p:sldId id="276" r:id="rId28"/>
     <p:sldId id="277" r:id="rId29"/>
     <p:sldId id="278" r:id="rId30"/>
+    <p:sldId id="279" r:id="rId31"/>
   </p:sldIdLst>
   <p:sldSz cx="12188952" cy="6858000" type="screen4x3"/>
   <p:notesSz cx="6858000" cy="9144000"/>
@@ -594,17 +595,17 @@
           <a:lstStyle/>
           <a:p>
             <a:r>
-              <a:t>Selbstcheck (Sec 5) in Stille ausfüllen (ca. 3 Min.).</a:t>
-            </a:r>
-          </a:p>
-          <a:p>
-            <a:r>
-              <a:t>Jeden TN seinen nächsten Schritt mit konkretem Datum benennen lassen – soziale Verbindlichkeit erhöhen.</a:t>
-            </a:r>
-          </a:p>
-          <a:p>
-            <a:r>
-              <a:t>Feedbackbogen L1: 3 Minuten, nicht als Add-on behandeln.</a:t>
+              <a:t>Neue 2er-Gruppen bilden – nicht dieselben Paare wie bei AB-1.</a:t>
+            </a:r>
+          </a:p>
+          <a:p>
+            <a:r>
+              <a:t>Typischer Fehler: Einstiegssatz deutet Lösung bereits an oder lädt eine Partei stärker ein. TN erkennen das selbst im Sprachcheck – lernwirksamer als Trainer-Feedback.</a:t>
+            </a:r>
+          </a:p>
+          <a:p>
+            <a:r>
+              <a:t>Allparteilich heißt nicht meinungslos – es heißt: Meinung hat im Gespräch keinen Raum.</a:t>
             </a:r>
           </a:p>
         </p:txBody>
@@ -674,6 +675,86 @@
           <a:lstStyle/>
           <a:p>
             <a:r>
+              <a:t>Selbstcheck (Sec 5) in Stille ausfüllen (ca. 3 Min.).</a:t>
+            </a:r>
+          </a:p>
+          <a:p>
+            <a:r>
+              <a:t>Jeden TN seinen nächsten Schritt mit konkretem Datum benennen lassen – soziale Verbindlichkeit erhöhen.</a:t>
+            </a:r>
+          </a:p>
+          <a:p>
+            <a:r>
+              <a:t>Feedbackbogen L1: 3 Minuten, nicht als Add-on behandeln.</a:t>
+            </a:r>
+          </a:p>
+        </p:txBody>
+      </p:sp>
+      <p:sp>
+        <p:nvSpPr>
+          <p:cNvPr id="4" name="Slide Number Placeholder 3"/>
+          <p:cNvSpPr>
+            <a:spLocks noGrp="1"/>
+          </p:cNvSpPr>
+          <p:nvPr>
+            <p:ph type="sldNum" idx="5" sz="quarter"/>
+          </p:nvPr>
+        </p:nvSpPr>
+        <p:spPr/>
+      </p:sp>
+    </p:spTree>
+  </p:cSld>
+  <p:clrMapOvr>
+    <a:masterClrMapping/>
+  </p:clrMapOvr>
+</p:notes>
+</file>
+
+<file path=ppt/notesSlides/notesSlide12.xml><?xml version="1.0" encoding="utf-8"?>
+<p:notes xmlns:a="http://schemas.openxmlformats.org/drawingml/2006/main" xmlns:p="http://schemas.openxmlformats.org/presentationml/2006/main" xmlns:r="http://schemas.openxmlformats.org/officeDocument/2006/relationships">
+  <p:cSld>
+    <p:spTree>
+      <p:nvGrpSpPr>
+        <p:cNvPr id="1" name=""/>
+        <p:cNvGrpSpPr/>
+        <p:nvPr/>
+      </p:nvGrpSpPr>
+      <p:grpSpPr>
+        <a:xfrm>
+          <a:off x="0" y="0"/>
+          <a:ext cx="0" cy="0"/>
+          <a:chOff x="0" y="0"/>
+          <a:chExt cx="0" cy="0"/>
+        </a:xfrm>
+      </p:grpSpPr>
+      <p:sp>
+        <p:nvSpPr>
+          <p:cNvPr id="2" name="Slide Image Placeholder 1"/>
+          <p:cNvSpPr>
+            <a:spLocks noGrp="1"/>
+          </p:cNvSpPr>
+          <p:nvPr>
+            <p:ph type="sldImg" idx="2"/>
+          </p:nvPr>
+        </p:nvSpPr>
+        <p:spPr/>
+      </p:sp>
+      <p:sp>
+        <p:nvSpPr>
+          <p:cNvPr id="3" name="Notes Placeholder 2"/>
+          <p:cNvSpPr>
+            <a:spLocks noGrp="1"/>
+          </p:cNvSpPr>
+          <p:nvPr>
+            <p:ph type="body" idx="3" sz="quarter"/>
+          </p:nvPr>
+        </p:nvSpPr>
+        <p:spPr/>
+        <p:txBody>
+          <a:bodyPr/>
+          <a:lstStyle/>
+          <a:p>
+            <a:r>
               <a:t>Greenleaf-Test vorlesen: „Wachsen die Menschen, denen Sie führend begegnen – werden sie kompetenter, freier, eigenverantwortlicher?“</a:t>
             </a:r>
           </a:p>
@@ -1314,17 +1395,27 @@
           <a:lstStyle/>
           <a:p>
             <a:r>
-              <a:t>Neue 2er-Gruppen bilden – nicht dieselben Paare wie bei AB-1.</a:t>
-            </a:r>
-          </a:p>
-          <a:p>
-            <a:r>
-              <a:t>Typischer Fehler: Einstiegssatz deutet Lösung bereits an oder lädt eine Partei stärker ein. TN erkennen das selbst im Sprachcheck – lernwirksamer als Trainer-Feedback.</a:t>
-            </a:r>
-          </a:p>
-          <a:p>
-            <a:r>
-              <a:t>Allparteilich heißt nicht meinungslos – es heißt: Meinung hat im Gespräch keinen Raum.</a:t>
+              <a:t>Fallbringer vorab rekrutieren – aus der Einstiegsrunde. Falls niemand: Trainer übernimmt Monikas Rolle.</a:t>
+            </a:r>
+          </a:p>
+          <a:p>
+            <a:r>
+              <a:t>Schlüsselfrage in Schritt 3 schärfen, wenn zu weit: „Formuliere die Frage so, dass du am Ende des Gesprächs sagen kannst: Diese Antwort hat mir geholfen, den nächsten Schritt zu tun.“</a:t>
+            </a:r>
+          </a:p>
+          <a:p>
+            <a:r>
+              <a:t>Schritt 5a (5 Min.) ist stilles Schreiben ohne Gruppeninteraktion – Fallbringer formuliert Einstiegssatz allein.</a:t>
+            </a:r>
+          </a:p>
+          <a:p>
+            <a:r>
+              <a:t>Schritt 5b (10 Min.) ist der Sprachcheck: allparteilich oder Partei-ergreifend? Einladend oder defensiv auslösend?</a:t>
+            </a:r>
+          </a:p>
+          <a:p>
+            <a:r>
+              <a:t>Befangenheitsfall: Falls TN einwirft, dass er als TL selbst zu befangen wäre – produktiver Einstieg in Moderatoren-Befangenheit und transparente Übergabe.</a:t>
             </a:r>
           </a:p>
         </p:txBody>
@@ -8189,6 +8280,49 @@
             <a:avLst/>
           </a:prstGeom>
           <a:solidFill>
+            <a:srgbClr val="EDEDF3"/>
+          </a:solidFill>
+          <a:ln>
+            <a:noFill/>
+          </a:ln>
+        </p:spPr>
+        <p:style>
+          <a:lnRef idx="1">
+            <a:schemeClr val="accent1"/>
+          </a:lnRef>
+          <a:fillRef idx="3">
+            <a:schemeClr val="accent1"/>
+          </a:fillRef>
+          <a:effectRef idx="2">
+            <a:schemeClr val="accent1"/>
+          </a:effectRef>
+          <a:fontRef idx="minor">
+            <a:schemeClr val="lt1"/>
+          </a:fontRef>
+        </p:style>
+        <p:txBody>
+          <a:bodyPr rtlCol="0" anchor="ctr"/>
+          <a:lstStyle/>
+          <a:p>
+            <a:pPr algn="ctr"/>
+          </a:p>
+        </p:txBody>
+      </p:sp>
+      <p:sp>
+        <p:nvSpPr>
+          <p:cNvPr id="3" name="Rectangle 2"/>
+          <p:cNvSpPr/>
+          <p:nvPr/>
+        </p:nvSpPr>
+        <p:spPr>
+          <a:xfrm>
+            <a:off x="0" y="0"/>
+            <a:ext cx="12188952" cy="50292"/>
+          </a:xfrm>
+          <a:prstGeom prst="rect">
+            <a:avLst/>
+          </a:prstGeom>
+          <a:solidFill>
             <a:srgbClr val="1F2C56"/>
           </a:solidFill>
           <a:ln>
@@ -8219,14 +8353,14 @@
       </p:sp>
       <p:sp>
         <p:nvSpPr>
-          <p:cNvPr id="3" name="TextBox 2"/>
+          <p:cNvPr id="4" name="TextBox 3"/>
           <p:cNvSpPr txBox="1"/>
           <p:nvPr/>
         </p:nvSpPr>
         <p:spPr>
           <a:xfrm>
-            <a:off x="685800" y="2377440"/>
-            <a:ext cx="10817352" cy="365760"/>
+            <a:off x="685800" y="109728"/>
+            <a:ext cx="10817352" cy="228600"/>
           </a:xfrm>
           <a:prstGeom prst="rect">
             <a:avLst/>
@@ -8241,27 +8375,70 @@
           <a:p>
             <a:pPr algn="l"/>
             <a:r>
-              <a:rPr sz="1200">
-                <a:solidFill>
-                  <a:srgbClr val="D9C089"/>
+              <a:rPr sz="750">
+                <a:solidFill>
+                  <a:srgbClr val="78808C"/>
                 </a:solidFill>
                 <a:latin typeface="Consolas"/>
               </a:rPr>
-              <a:t>EINZELARBEIT (20 MIN.) + PEER-SPRACHCHECK (10 MIN.)</a:t>
-            </a:r>
-          </a:p>
-        </p:txBody>
-      </p:sp>
-      <p:sp>
-        <p:nvSpPr>
-          <p:cNvPr id="4" name="Rectangle 3"/>
+              <a:t>TL08  ·  PRAXISFALL</a:t>
+            </a:r>
+          </a:p>
+        </p:txBody>
+      </p:sp>
+      <p:sp>
+        <p:nvSpPr>
+          <p:cNvPr id="5" name="Rectangle 4"/>
           <p:cNvSpPr/>
           <p:nvPr/>
         </p:nvSpPr>
         <p:spPr>
           <a:xfrm>
-            <a:off x="685800" y="2788920"/>
-            <a:ext cx="548640" cy="38100"/>
+            <a:off x="0" y="1234440"/>
+            <a:ext cx="12188952" cy="12700"/>
+          </a:xfrm>
+          <a:prstGeom prst="rect">
+            <a:avLst/>
+          </a:prstGeom>
+          <a:solidFill>
+            <a:srgbClr val="D8DFE4"/>
+          </a:solidFill>
+          <a:ln>
+            <a:noFill/>
+          </a:ln>
+        </p:spPr>
+        <p:style>
+          <a:lnRef idx="1">
+            <a:schemeClr val="accent1"/>
+          </a:lnRef>
+          <a:fillRef idx="3">
+            <a:schemeClr val="accent1"/>
+          </a:fillRef>
+          <a:effectRef idx="2">
+            <a:schemeClr val="accent1"/>
+          </a:effectRef>
+          <a:fontRef idx="minor">
+            <a:schemeClr val="lt1"/>
+          </a:fontRef>
+        </p:style>
+        <p:txBody>
+          <a:bodyPr rtlCol="0" anchor="ctr"/>
+          <a:lstStyle/>
+          <a:p>
+            <a:pPr algn="ctr"/>
+          </a:p>
+        </p:txBody>
+      </p:sp>
+      <p:sp>
+        <p:nvSpPr>
+          <p:cNvPr id="6" name="Rectangle 5"/>
+          <p:cNvSpPr/>
+          <p:nvPr/>
+        </p:nvSpPr>
+        <p:spPr>
+          <a:xfrm>
+            <a:off x="685800" y="502920"/>
+            <a:ext cx="36576" cy="658368"/>
           </a:xfrm>
           <a:prstGeom prst="rect">
             <a:avLst/>
@@ -8297,14 +8474,14 @@
       </p:sp>
       <p:sp>
         <p:nvSpPr>
-          <p:cNvPr id="5" name="TextBox 4"/>
+          <p:cNvPr id="7" name="TextBox 6"/>
           <p:cNvSpPr txBox="1"/>
           <p:nvPr/>
         </p:nvSpPr>
         <p:spPr>
           <a:xfrm>
-            <a:off x="685800" y="3017520"/>
-            <a:ext cx="10817352" cy="1463040"/>
+            <a:off x="813816" y="502920"/>
+            <a:ext cx="10634472" cy="685800"/>
           </a:xfrm>
           <a:prstGeom prst="rect">
             <a:avLst/>
@@ -8319,27 +8496,150 @@
           <a:p>
             <a:pPr algn="l"/>
             <a:r>
-              <a:rPr sz="4000" b="1" i="0">
-                <a:solidFill>
-                  <a:srgbClr val="FFFFFF"/>
+              <a:rPr sz="2400" b="1" i="0">
+                <a:solidFill>
+                  <a:srgbClr val="1F2C56"/>
                 </a:solidFill>
                 <a:latin typeface="Arial"/>
               </a:rPr>
-              <a:t>AB-2: Konfliktmoderation schriftlich vorbereiten</a:t>
-            </a:r>
-          </a:p>
-        </p:txBody>
-      </p:sp>
-      <p:sp>
-        <p:nvSpPr>
-          <p:cNvPr id="6" name="TextBox 5"/>
+              <a:t>Teamleiterin Monika – VR-Bank Musterregion eG, Firmenkunden-Team Süd</a:t>
+            </a:r>
+          </a:p>
+        </p:txBody>
+      </p:sp>
+      <p:sp>
+        <p:nvSpPr>
+          <p:cNvPr id="8" name="Rectangle 7"/>
+          <p:cNvSpPr/>
+          <p:nvPr/>
+        </p:nvSpPr>
+        <p:spPr>
+          <a:xfrm>
+            <a:off x="685800" y="1600200"/>
+            <a:ext cx="10817352" cy="2131739"/>
+          </a:xfrm>
+          <a:prstGeom prst="rect">
+            <a:avLst/>
+          </a:prstGeom>
+          <a:solidFill>
+            <a:srgbClr val="FFFFFF"/>
+          </a:solidFill>
+          <a:ln w="9525">
+            <a:solidFill>
+              <a:srgbClr val="D8DFE4"/>
+            </a:solidFill>
+          </a:ln>
+        </p:spPr>
+        <p:style>
+          <a:lnRef idx="1">
+            <a:schemeClr val="accent1"/>
+          </a:lnRef>
+          <a:fillRef idx="3">
+            <a:schemeClr val="accent1"/>
+          </a:fillRef>
+          <a:effectRef idx="2">
+            <a:schemeClr val="accent1"/>
+          </a:effectRef>
+          <a:fontRef idx="minor">
+            <a:schemeClr val="lt1"/>
+          </a:fontRef>
+        </p:style>
+        <p:txBody>
+          <a:bodyPr rtlCol="0" anchor="ctr"/>
+          <a:lstStyle/>
+          <a:p>
+            <a:pPr algn="ctr"/>
+          </a:p>
+        </p:txBody>
+      </p:sp>
+      <p:sp>
+        <p:nvSpPr>
+          <p:cNvPr id="9" name="Rectangle 8"/>
+          <p:cNvSpPr/>
+          <p:nvPr/>
+        </p:nvSpPr>
+        <p:spPr>
+          <a:xfrm>
+            <a:off x="685800" y="1600200"/>
+            <a:ext cx="36576" cy="2131739"/>
+          </a:xfrm>
+          <a:prstGeom prst="rect">
+            <a:avLst/>
+          </a:prstGeom>
+          <a:solidFill>
+            <a:srgbClr val="1F2C56"/>
+          </a:solidFill>
+          <a:ln>
+            <a:noFill/>
+          </a:ln>
+        </p:spPr>
+        <p:style>
+          <a:lnRef idx="1">
+            <a:schemeClr val="accent1"/>
+          </a:lnRef>
+          <a:fillRef idx="3">
+            <a:schemeClr val="accent1"/>
+          </a:fillRef>
+          <a:effectRef idx="2">
+            <a:schemeClr val="accent1"/>
+          </a:effectRef>
+          <a:fontRef idx="minor">
+            <a:schemeClr val="lt1"/>
+          </a:fontRef>
+        </p:style>
+        <p:txBody>
+          <a:bodyPr rtlCol="0" anchor="ctr"/>
+          <a:lstStyle/>
+          <a:p>
+            <a:pPr algn="ctr"/>
+          </a:p>
+        </p:txBody>
+      </p:sp>
+      <p:sp>
+        <p:nvSpPr>
+          <p:cNvPr id="10" name="TextBox 9"/>
           <p:cNvSpPr txBox="1"/>
           <p:nvPr/>
         </p:nvSpPr>
         <p:spPr>
           <a:xfrm>
-            <a:off x="685800" y="4480560"/>
-            <a:ext cx="8653881" cy="1280160"/>
+            <a:off x="941832" y="1783080"/>
+            <a:ext cx="10268712" cy="228600"/>
+          </a:xfrm>
+          <a:prstGeom prst="rect">
+            <a:avLst/>
+          </a:prstGeom>
+          <a:noFill/>
+        </p:spPr>
+        <p:txBody>
+          <a:bodyPr wrap="none">
+            <a:spAutoFit/>
+          </a:bodyPr>
+          <a:lstStyle/>
+          <a:p>
+            <a:pPr algn="l"/>
+            <a:r>
+              <a:rPr sz="750">
+                <a:solidFill>
+                  <a:srgbClr val="78808C"/>
+                </a:solidFill>
+                <a:latin typeface="Consolas"/>
+              </a:rPr>
+              <a:t>AUSGANGSSITUATION</a:t>
+            </a:r>
+          </a:p>
+        </p:txBody>
+      </p:sp>
+      <p:sp>
+        <p:nvSpPr>
+          <p:cNvPr id="11" name="TextBox 10"/>
+          <p:cNvSpPr txBox="1"/>
+          <p:nvPr/>
+        </p:nvSpPr>
+        <p:spPr>
+          <a:xfrm>
+            <a:off x="941832" y="2084831"/>
+            <a:ext cx="7680960" cy="1491659"/>
           </a:xfrm>
           <a:prstGeom prst="rect">
             <a:avLst/>
@@ -8352,29 +8652,77 @@
           </a:bodyPr>
           <a:lstStyle/>
           <a:p>
-            <a:pPr algn="l"/>
-            <a:r>
-              <a:rPr sz="1600" b="0" i="0">
-                <a:solidFill>
-                  <a:srgbClr val="C8D2E6"/>
+            <a:pPr>
+              <a:spcAft>
+                <a:spcPts val="600"/>
+              </a:spcAft>
+            </a:pPr>
+            <a:r>
+              <a:rPr sz="1300">
+                <a:solidFill>
+                  <a:srgbClr val="3D5466"/>
                 </a:solidFill>
                 <a:latin typeface="Arial"/>
               </a:rPr>
-              <a:t>Glasl-Einordnung + Interessen-Analyse + allparteilicher Einstiegssatz</a:t>
-            </a:r>
-          </a:p>
-        </p:txBody>
-      </p:sp>
-      <p:sp>
-        <p:nvSpPr>
-          <p:cNvPr id="7" name="TextBox 6"/>
+              <a:t>Stefan (17 J. FK-Erfahrung) und Jana (11 J.) eskalieren seit drei Wochen einen Streit um die Kundenzuständigkeit bei Familie Brenner (Bauunternehmen, 8,5 Mio. EUR Umsatz). Stefan hat den Gesamtkunden im Bestand; Jana hat im letzten Jahr eine Baufinanzierung über Schwäbisch Hall abgeschlossen (Provision ca. 3.400 EUR, ungeklärt). Beide kommunizieren seit zwei Wochen nur noch per E-Mail mit CC an Monika – ein weiterer Berater hat Sympathie für Jana signalisiert. Monika muss: (1) die Strukturfrage klären (CRM-Zuständigkeit, Provisionsregel) – vor der Moderation, nicht im Gespräch. (2) den Eskalationsgrad einordnen. (3) einen allparteilichen Einstiegssatz für das erste Einzelgespräch formulieren.
+</a:t>
+            </a:r>
+          </a:p>
+        </p:txBody>
+      </p:sp>
+      <p:sp>
+        <p:nvSpPr>
+          <p:cNvPr id="12" name="Rectangle 11"/>
+          <p:cNvSpPr/>
+          <p:nvPr/>
+        </p:nvSpPr>
+        <p:spPr>
+          <a:xfrm>
+            <a:off x="0" y="6510528"/>
+            <a:ext cx="12188952" cy="347472"/>
+          </a:xfrm>
+          <a:prstGeom prst="rect">
+            <a:avLst/>
+          </a:prstGeom>
+          <a:solidFill>
+            <a:srgbClr val="0A1937"/>
+          </a:solidFill>
+          <a:ln>
+            <a:noFill/>
+          </a:ln>
+        </p:spPr>
+        <p:style>
+          <a:lnRef idx="1">
+            <a:schemeClr val="accent1"/>
+          </a:lnRef>
+          <a:fillRef idx="3">
+            <a:schemeClr val="accent1"/>
+          </a:fillRef>
+          <a:effectRef idx="2">
+            <a:schemeClr val="accent1"/>
+          </a:effectRef>
+          <a:fontRef idx="minor">
+            <a:schemeClr val="lt1"/>
+          </a:fontRef>
+        </p:style>
+        <p:txBody>
+          <a:bodyPr rtlCol="0" anchor="ctr"/>
+          <a:lstStyle/>
+          <a:p>
+            <a:pPr algn="ctr"/>
+          </a:p>
+        </p:txBody>
+      </p:sp>
+      <p:sp>
+        <p:nvSpPr>
+          <p:cNvPr id="13" name="TextBox 12"/>
           <p:cNvSpPr txBox="1"/>
           <p:nvPr/>
         </p:nvSpPr>
         <p:spPr>
           <a:xfrm>
-            <a:off x="685800" y="6355080"/>
-            <a:ext cx="10817352" cy="274320"/>
+            <a:off x="685800" y="6583680"/>
+            <a:ext cx="6490411" cy="256032"/>
           </a:xfrm>
           <a:prstGeom prst="rect">
             <a:avLst/>
@@ -8391,11 +8739,46 @@
             <a:r>
               <a:rPr sz="700">
                 <a:solidFill>
-                  <a:srgbClr val="8CA0C3"/>
+                  <a:srgbClr val="A0B4D2"/>
                 </a:solidFill>
                 <a:latin typeface="Consolas"/>
               </a:rPr>
               <a:t>FKB Campus  ·  TL08</a:t>
+            </a:r>
+          </a:p>
+        </p:txBody>
+      </p:sp>
+      <p:sp>
+        <p:nvSpPr>
+          <p:cNvPr id="14" name="TextBox 13"/>
+          <p:cNvSpPr txBox="1"/>
+          <p:nvPr/>
+        </p:nvSpPr>
+        <p:spPr>
+          <a:xfrm>
+            <a:off x="7176211" y="6583680"/>
+            <a:ext cx="4326940" cy="256032"/>
+          </a:xfrm>
+          <a:prstGeom prst="rect">
+            <a:avLst/>
+          </a:prstGeom>
+          <a:noFill/>
+        </p:spPr>
+        <p:txBody>
+          <a:bodyPr wrap="none">
+            <a:spAutoFit/>
+          </a:bodyPr>
+          <a:lstStyle/>
+          <a:p>
+            <a:pPr algn="r"/>
+            <a:r>
+              <a:rPr sz="700">
+                <a:solidFill>
+                  <a:srgbClr val="A0B4D2"/>
+                </a:solidFill>
+                <a:latin typeface="Consolas"/>
+              </a:rPr>
+              <a:t>Fall zuerst lesen</a:t>
             </a:r>
           </a:p>
         </p:txBody>
@@ -8831,7 +9214,7 @@
             <a:avLst/>
           </a:prstGeom>
           <a:solidFill>
-            <a:srgbClr val="EDEDF3"/>
+            <a:srgbClr val="1F2C56"/>
           </a:solidFill>
           <a:ln>
             <a:noFill/>
@@ -8861,57 +9244,14 @@
       </p:sp>
       <p:sp>
         <p:nvSpPr>
-          <p:cNvPr id="3" name="Rectangle 2"/>
-          <p:cNvSpPr/>
-          <p:nvPr/>
-        </p:nvSpPr>
-        <p:spPr>
-          <a:xfrm>
-            <a:off x="0" y="0"/>
-            <a:ext cx="12188952" cy="50292"/>
-          </a:xfrm>
-          <a:prstGeom prst="rect">
-            <a:avLst/>
-          </a:prstGeom>
-          <a:solidFill>
-            <a:srgbClr val="1F2C56"/>
-          </a:solidFill>
-          <a:ln>
-            <a:noFill/>
-          </a:ln>
-        </p:spPr>
-        <p:style>
-          <a:lnRef idx="1">
-            <a:schemeClr val="accent1"/>
-          </a:lnRef>
-          <a:fillRef idx="3">
-            <a:schemeClr val="accent1"/>
-          </a:fillRef>
-          <a:effectRef idx="2">
-            <a:schemeClr val="accent1"/>
-          </a:effectRef>
-          <a:fontRef idx="minor">
-            <a:schemeClr val="lt1"/>
-          </a:fontRef>
-        </p:style>
-        <p:txBody>
-          <a:bodyPr rtlCol="0" anchor="ctr"/>
-          <a:lstStyle/>
-          <a:p>
-            <a:pPr algn="ctr"/>
-          </a:p>
-        </p:txBody>
-      </p:sp>
-      <p:sp>
-        <p:nvSpPr>
-          <p:cNvPr id="4" name="TextBox 3"/>
+          <p:cNvPr id="3" name="TextBox 2"/>
           <p:cNvSpPr txBox="1"/>
           <p:nvPr/>
         </p:nvSpPr>
         <p:spPr>
           <a:xfrm>
-            <a:off x="685800" y="109728"/>
-            <a:ext cx="10817352" cy="228600"/>
+            <a:off x="685800" y="2377440"/>
+            <a:ext cx="10817352" cy="365760"/>
           </a:xfrm>
           <a:prstGeom prst="rect">
             <a:avLst/>
@@ -8926,70 +9266,27 @@
           <a:p>
             <a:pPr algn="l"/>
             <a:r>
-              <a:rPr sz="750">
-                <a:solidFill>
-                  <a:srgbClr val="78808C"/>
+              <a:rPr sz="1200">
+                <a:solidFill>
+                  <a:srgbClr val="D9C089"/>
                 </a:solidFill>
                 <a:latin typeface="Consolas"/>
               </a:rPr>
-              <a:t>TL08  ·  ARBEITSBLATT</a:t>
-            </a:r>
-          </a:p>
-        </p:txBody>
-      </p:sp>
-      <p:sp>
-        <p:nvSpPr>
-          <p:cNvPr id="5" name="Rectangle 4"/>
+              <a:t>EINZELARBEIT (20 MIN.) + PEER-SPRACHCHECK (10 MIN.)</a:t>
+            </a:r>
+          </a:p>
+        </p:txBody>
+      </p:sp>
+      <p:sp>
+        <p:nvSpPr>
+          <p:cNvPr id="4" name="Rectangle 3"/>
           <p:cNvSpPr/>
           <p:nvPr/>
         </p:nvSpPr>
         <p:spPr>
           <a:xfrm>
-            <a:off x="0" y="1234440"/>
-            <a:ext cx="12188952" cy="12700"/>
-          </a:xfrm>
-          <a:prstGeom prst="rect">
-            <a:avLst/>
-          </a:prstGeom>
-          <a:solidFill>
-            <a:srgbClr val="D8DFE4"/>
-          </a:solidFill>
-          <a:ln>
-            <a:noFill/>
-          </a:ln>
-        </p:spPr>
-        <p:style>
-          <a:lnRef idx="1">
-            <a:schemeClr val="accent1"/>
-          </a:lnRef>
-          <a:fillRef idx="3">
-            <a:schemeClr val="accent1"/>
-          </a:fillRef>
-          <a:effectRef idx="2">
-            <a:schemeClr val="accent1"/>
-          </a:effectRef>
-          <a:fontRef idx="minor">
-            <a:schemeClr val="lt1"/>
-          </a:fontRef>
-        </p:style>
-        <p:txBody>
-          <a:bodyPr rtlCol="0" anchor="ctr"/>
-          <a:lstStyle/>
-          <a:p>
-            <a:pPr algn="ctr"/>
-          </a:p>
-        </p:txBody>
-      </p:sp>
-      <p:sp>
-        <p:nvSpPr>
-          <p:cNvPr id="6" name="Rectangle 5"/>
-          <p:cNvSpPr/>
-          <p:nvPr/>
-        </p:nvSpPr>
-        <p:spPr>
-          <a:xfrm>
-            <a:off x="685800" y="502920"/>
-            <a:ext cx="36576" cy="658368"/>
+            <a:off x="685800" y="2788920"/>
+            <a:ext cx="548640" cy="38100"/>
           </a:xfrm>
           <a:prstGeom prst="rect">
             <a:avLst/>
@@ -9025,14 +9322,14 @@
       </p:sp>
       <p:sp>
         <p:nvSpPr>
-          <p:cNvPr id="7" name="TextBox 6"/>
+          <p:cNvPr id="5" name="TextBox 4"/>
           <p:cNvSpPr txBox="1"/>
           <p:nvPr/>
         </p:nvSpPr>
         <p:spPr>
           <a:xfrm>
-            <a:off x="813816" y="502920"/>
-            <a:ext cx="10634472" cy="685800"/>
+            <a:off x="685800" y="3017520"/>
+            <a:ext cx="10817352" cy="1463040"/>
           </a:xfrm>
           <a:prstGeom prst="rect">
             <a:avLst/>
@@ -9047,27 +9344,27 @@
           <a:p>
             <a:pPr algn="l"/>
             <a:r>
-              <a:rPr sz="2400" b="1" i="0">
-                <a:solidFill>
-                  <a:srgbClr val="1F2C56"/>
+              <a:rPr sz="4000" b="1" i="0">
+                <a:solidFill>
+                  <a:srgbClr val="FFFFFF"/>
                 </a:solidFill>
                 <a:latin typeface="Arial"/>
               </a:rPr>
-              <a:t>AB-2: Erst Struktur klären – dann moderieren</a:t>
-            </a:r>
-          </a:p>
-        </p:txBody>
-      </p:sp>
-      <p:sp>
-        <p:nvSpPr>
-          <p:cNvPr id="8" name="TextBox 7"/>
+              <a:t>AB-2: Konfliktmoderation schriftlich vorbereiten</a:t>
+            </a:r>
+          </a:p>
+        </p:txBody>
+      </p:sp>
+      <p:sp>
+        <p:nvSpPr>
+          <p:cNvPr id="6" name="TextBox 5"/>
           <p:cNvSpPr txBox="1"/>
           <p:nvPr/>
         </p:nvSpPr>
         <p:spPr>
           <a:xfrm>
-            <a:off x="685800" y="1554480"/>
-            <a:ext cx="10817352" cy="3840480"/>
+            <a:off x="685800" y="4480560"/>
+            <a:ext cx="8653881" cy="1280160"/>
           </a:xfrm>
           <a:prstGeom prst="rect">
             <a:avLst/>
@@ -9080,233 +9377,29 @@
           </a:bodyPr>
           <a:lstStyle/>
           <a:p>
-            <a:pPr marL="190500" indent="-190500">
-              <a:spcBef>
-                <a:spcPts val="400"/>
-              </a:spcBef>
-              <a:spcAft>
-                <a:spcPts val="200"/>
-              </a:spcAft>
-            </a:pPr>
-            <a:r>
-              <a:rPr sz="1400">
-                <a:solidFill>
-                  <a:srgbClr val="3D5466"/>
+            <a:pPr algn="l"/>
+            <a:r>
+              <a:rPr sz="1600" b="0" i="0">
+                <a:solidFill>
+                  <a:srgbClr val="C8D2E6"/>
                 </a:solidFill>
                 <a:latin typeface="Arial"/>
               </a:rPr>
-              <a:t>▸  Vorschritt: Welche Strukturfrage muss vor dem Gespräch entschieden werden?</a:t>
-            </a:r>
-          </a:p>
-          <a:p>
-            <a:pPr marL="190500" indent="-190500">
-              <a:spcBef>
-                <a:spcPts val="400"/>
-              </a:spcBef>
-              <a:spcAft>
-                <a:spcPts val="200"/>
-              </a:spcAft>
-            </a:pPr>
-            <a:r>
-              <a:rPr sz="1400">
-                <a:solidFill>
-                  <a:srgbClr val="3D5466"/>
-                </a:solidFill>
-                <a:latin typeface="Arial"/>
-              </a:rPr>
-              <a:t>▸  Schritt 1: Konfliktart und Glasl-Stufe einordnen – mit Begründung.</a:t>
-            </a:r>
-          </a:p>
-          <a:p>
-            <a:pPr marL="190500" indent="-190500">
-              <a:spcBef>
-                <a:spcPts val="400"/>
-              </a:spcBef>
-              <a:spcAft>
-                <a:spcPts val="200"/>
-              </a:spcAft>
-            </a:pPr>
-            <a:r>
-              <a:rPr sz="1400">
-                <a:solidFill>
-                  <a:srgbClr val="3D5466"/>
-                </a:solidFill>
-                <a:latin typeface="Arial"/>
-              </a:rPr>
-              <a:t>▸  Schritt 2: Position vs. Interesse der Konfliktpartei herausarbeiten.</a:t>
-            </a:r>
-          </a:p>
-          <a:p>
-            <a:pPr marL="190500" indent="-190500">
-              <a:spcBef>
-                <a:spcPts val="400"/>
-              </a:spcBef>
-              <a:spcAft>
-                <a:spcPts val="200"/>
-              </a:spcAft>
-            </a:pPr>
-            <a:r>
-              <a:rPr sz="1400">
-                <a:solidFill>
-                  <a:srgbClr val="3D5466"/>
-                </a:solidFill>
-                <a:latin typeface="Arial"/>
-              </a:rPr>
-              <a:t>▸  Schritt 3: Allparteilichen Einstiegssatz formulieren.</a:t>
-            </a:r>
-          </a:p>
-          <a:p>
-            <a:pPr marL="190500" indent="-190500">
-              <a:spcBef>
-                <a:spcPts val="400"/>
-              </a:spcBef>
-              <a:spcAft>
-                <a:spcPts val="200"/>
-              </a:spcAft>
-            </a:pPr>
-            <a:r>
-              <a:rPr sz="1400">
-                <a:solidFill>
-                  <a:srgbClr val="3D5466"/>
-                </a:solidFill>
-                <a:latin typeface="Arial"/>
-              </a:rPr>
-              <a:t>▸  Sprachcheck: allparteilich oder Partei-ergreifend? Einladend oder defensiv?</a:t>
-            </a:r>
-          </a:p>
-        </p:txBody>
-      </p:sp>
-      <p:sp>
-        <p:nvSpPr>
-          <p:cNvPr id="9" name="Rectangle 8"/>
-          <p:cNvSpPr/>
-          <p:nvPr/>
-        </p:nvSpPr>
-        <p:spPr>
-          <a:xfrm>
-            <a:off x="685800" y="5486400"/>
-            <a:ext cx="10817352" cy="640080"/>
-          </a:xfrm>
-          <a:prstGeom prst="rect">
-            <a:avLst/>
-          </a:prstGeom>
-          <a:solidFill>
-            <a:srgbClr val="1F2C56"/>
-          </a:solidFill>
-          <a:ln>
-            <a:noFill/>
-          </a:ln>
-        </p:spPr>
-        <p:style>
-          <a:lnRef idx="1">
-            <a:schemeClr val="accent1"/>
-          </a:lnRef>
-          <a:fillRef idx="3">
-            <a:schemeClr val="accent1"/>
-          </a:fillRef>
-          <a:effectRef idx="2">
-            <a:schemeClr val="accent1"/>
-          </a:effectRef>
-          <a:fontRef idx="minor">
-            <a:schemeClr val="lt1"/>
-          </a:fontRef>
-        </p:style>
-        <p:txBody>
-          <a:bodyPr rtlCol="0" anchor="ctr"/>
-          <a:lstStyle/>
-          <a:p>
-            <a:pPr algn="ctr"/>
-          </a:p>
-        </p:txBody>
-      </p:sp>
-      <p:sp>
-        <p:nvSpPr>
-          <p:cNvPr id="10" name="TextBox 9"/>
+              <a:t>Glasl-Einordnung + Interessen-Analyse + allparteilicher Einstiegssatz</a:t>
+            </a:r>
+          </a:p>
+        </p:txBody>
+      </p:sp>
+      <p:sp>
+        <p:nvSpPr>
+          <p:cNvPr id="7" name="TextBox 6"/>
           <p:cNvSpPr txBox="1"/>
           <p:nvPr/>
         </p:nvSpPr>
         <p:spPr>
           <a:xfrm>
-            <a:off x="868680" y="5596128"/>
-            <a:ext cx="10451592" cy="457200"/>
-          </a:xfrm>
-          <a:prstGeom prst="rect">
-            <a:avLst/>
-          </a:prstGeom>
-          <a:noFill/>
-        </p:spPr>
-        <p:txBody>
-          <a:bodyPr wrap="square">
-            <a:spAutoFit/>
-          </a:bodyPr>
-          <a:lstStyle/>
-          <a:p>
-            <a:pPr algn="l"/>
-            <a:r>
-              <a:rPr sz="1300" b="1" i="0">
-                <a:solidFill>
-                  <a:srgbClr val="FFFFFF"/>
-                </a:solidFill>
-                <a:latin typeface="Arial"/>
-              </a:rPr>
-              <a:t>→  Bearbeitung im Teilnehmer-Workbook (Arbeitsblatt mit Ausfüllfeldern)</a:t>
-            </a:r>
-          </a:p>
-        </p:txBody>
-      </p:sp>
-      <p:sp>
-        <p:nvSpPr>
-          <p:cNvPr id="11" name="Rectangle 10"/>
-          <p:cNvSpPr/>
-          <p:nvPr/>
-        </p:nvSpPr>
-        <p:spPr>
-          <a:xfrm>
-            <a:off x="0" y="6510528"/>
-            <a:ext cx="12188952" cy="347472"/>
-          </a:xfrm>
-          <a:prstGeom prst="rect">
-            <a:avLst/>
-          </a:prstGeom>
-          <a:solidFill>
-            <a:srgbClr val="0A1937"/>
-          </a:solidFill>
-          <a:ln>
-            <a:noFill/>
-          </a:ln>
-        </p:spPr>
-        <p:style>
-          <a:lnRef idx="1">
-            <a:schemeClr val="accent1"/>
-          </a:lnRef>
-          <a:fillRef idx="3">
-            <a:schemeClr val="accent1"/>
-          </a:fillRef>
-          <a:effectRef idx="2">
-            <a:schemeClr val="accent1"/>
-          </a:effectRef>
-          <a:fontRef idx="minor">
-            <a:schemeClr val="lt1"/>
-          </a:fontRef>
-        </p:style>
-        <p:txBody>
-          <a:bodyPr rtlCol="0" anchor="ctr"/>
-          <a:lstStyle/>
-          <a:p>
-            <a:pPr algn="ctr"/>
-          </a:p>
-        </p:txBody>
-      </p:sp>
-      <p:sp>
-        <p:nvSpPr>
-          <p:cNvPr id="12" name="TextBox 11"/>
-          <p:cNvSpPr txBox="1"/>
-          <p:nvPr/>
-        </p:nvSpPr>
-        <p:spPr>
-          <a:xfrm>
-            <a:off x="685800" y="6583680"/>
-            <a:ext cx="6490411" cy="256032"/>
+            <a:off x="685800" y="6355080"/>
+            <a:ext cx="10817352" cy="274320"/>
           </a:xfrm>
           <a:prstGeom prst="rect">
             <a:avLst/>
@@ -9323,7 +9416,7 @@
             <a:r>
               <a:rPr sz="700">
                 <a:solidFill>
-                  <a:srgbClr val="A0B4D2"/>
+                  <a:srgbClr val="8CA0C3"/>
                 </a:solidFill>
                 <a:latin typeface="Consolas"/>
               </a:rPr>
@@ -9365,6 +9458,49 @@
             <a:avLst/>
           </a:prstGeom>
           <a:solidFill>
+            <a:srgbClr val="EDEDF3"/>
+          </a:solidFill>
+          <a:ln>
+            <a:noFill/>
+          </a:ln>
+        </p:spPr>
+        <p:style>
+          <a:lnRef idx="1">
+            <a:schemeClr val="accent1"/>
+          </a:lnRef>
+          <a:fillRef idx="3">
+            <a:schemeClr val="accent1"/>
+          </a:fillRef>
+          <a:effectRef idx="2">
+            <a:schemeClr val="accent1"/>
+          </a:effectRef>
+          <a:fontRef idx="minor">
+            <a:schemeClr val="lt1"/>
+          </a:fontRef>
+        </p:style>
+        <p:txBody>
+          <a:bodyPr rtlCol="0" anchor="ctr"/>
+          <a:lstStyle/>
+          <a:p>
+            <a:pPr algn="ctr"/>
+          </a:p>
+        </p:txBody>
+      </p:sp>
+      <p:sp>
+        <p:nvSpPr>
+          <p:cNvPr id="3" name="Rectangle 2"/>
+          <p:cNvSpPr/>
+          <p:nvPr/>
+        </p:nvSpPr>
+        <p:spPr>
+          <a:xfrm>
+            <a:off x="0" y="0"/>
+            <a:ext cx="12188952" cy="50292"/>
+          </a:xfrm>
+          <a:prstGeom prst="rect">
+            <a:avLst/>
+          </a:prstGeom>
+          <a:solidFill>
             <a:srgbClr val="1F2C56"/>
           </a:solidFill>
           <a:ln>
@@ -9395,14 +9531,14 @@
       </p:sp>
       <p:sp>
         <p:nvSpPr>
-          <p:cNvPr id="3" name="TextBox 2"/>
+          <p:cNvPr id="4" name="TextBox 3"/>
           <p:cNvSpPr txBox="1"/>
           <p:nvPr/>
         </p:nvSpPr>
         <p:spPr>
           <a:xfrm>
-            <a:off x="685800" y="2377440"/>
-            <a:ext cx="10817352" cy="365760"/>
+            <a:off x="685800" y="109728"/>
+            <a:ext cx="10817352" cy="228600"/>
           </a:xfrm>
           <a:prstGeom prst="rect">
             <a:avLst/>
@@ -9417,27 +9553,70 @@
           <a:p>
             <a:pPr algn="l"/>
             <a:r>
-              <a:rPr sz="1200">
-                <a:solidFill>
-                  <a:srgbClr val="D9C089"/>
+              <a:rPr sz="750">
+                <a:solidFill>
+                  <a:srgbClr val="78808C"/>
                 </a:solidFill>
                 <a:latin typeface="Consolas"/>
               </a:rPr>
-              <a:t>ABSCHLUSS</a:t>
-            </a:r>
-          </a:p>
-        </p:txBody>
-      </p:sp>
-      <p:sp>
-        <p:nvSpPr>
-          <p:cNvPr id="4" name="Rectangle 3"/>
+              <a:t>TL08  ·  ARBEITSBLATT</a:t>
+            </a:r>
+          </a:p>
+        </p:txBody>
+      </p:sp>
+      <p:sp>
+        <p:nvSpPr>
+          <p:cNvPr id="5" name="Rectangle 4"/>
           <p:cNvSpPr/>
           <p:nvPr/>
         </p:nvSpPr>
         <p:spPr>
           <a:xfrm>
-            <a:off x="685800" y="2788920"/>
-            <a:ext cx="548640" cy="38100"/>
+            <a:off x="0" y="1234440"/>
+            <a:ext cx="12188952" cy="12700"/>
+          </a:xfrm>
+          <a:prstGeom prst="rect">
+            <a:avLst/>
+          </a:prstGeom>
+          <a:solidFill>
+            <a:srgbClr val="D8DFE4"/>
+          </a:solidFill>
+          <a:ln>
+            <a:noFill/>
+          </a:ln>
+        </p:spPr>
+        <p:style>
+          <a:lnRef idx="1">
+            <a:schemeClr val="accent1"/>
+          </a:lnRef>
+          <a:fillRef idx="3">
+            <a:schemeClr val="accent1"/>
+          </a:fillRef>
+          <a:effectRef idx="2">
+            <a:schemeClr val="accent1"/>
+          </a:effectRef>
+          <a:fontRef idx="minor">
+            <a:schemeClr val="lt1"/>
+          </a:fontRef>
+        </p:style>
+        <p:txBody>
+          <a:bodyPr rtlCol="0" anchor="ctr"/>
+          <a:lstStyle/>
+          <a:p>
+            <a:pPr algn="ctr"/>
+          </a:p>
+        </p:txBody>
+      </p:sp>
+      <p:sp>
+        <p:nvSpPr>
+          <p:cNvPr id="6" name="Rectangle 5"/>
+          <p:cNvSpPr/>
+          <p:nvPr/>
+        </p:nvSpPr>
+        <p:spPr>
+          <a:xfrm>
+            <a:off x="685800" y="502920"/>
+            <a:ext cx="36576" cy="658368"/>
           </a:xfrm>
           <a:prstGeom prst="rect">
             <a:avLst/>
@@ -9473,14 +9652,14 @@
       </p:sp>
       <p:sp>
         <p:nvSpPr>
-          <p:cNvPr id="5" name="TextBox 4"/>
+          <p:cNvPr id="7" name="TextBox 6"/>
           <p:cNvSpPr txBox="1"/>
           <p:nvPr/>
         </p:nvSpPr>
         <p:spPr>
           <a:xfrm>
-            <a:off x="685800" y="3017520"/>
-            <a:ext cx="10817352" cy="1463040"/>
+            <a:off x="813816" y="502920"/>
+            <a:ext cx="10634472" cy="685800"/>
           </a:xfrm>
           <a:prstGeom prst="rect">
             <a:avLst/>
@@ -9495,27 +9674,27 @@
           <a:p>
             <a:pPr algn="l"/>
             <a:r>
-              <a:rPr sz="4000" b="1" i="0">
-                <a:solidFill>
-                  <a:srgbClr val="FFFFFF"/>
+              <a:rPr sz="2400" b="1" i="0">
+                <a:solidFill>
+                  <a:srgbClr val="1F2C56"/>
                 </a:solidFill>
                 <a:latin typeface="Arial"/>
               </a:rPr>
-              <a:t>Transfer &amp; Haltung</a:t>
-            </a:r>
-          </a:p>
-        </p:txBody>
-      </p:sp>
-      <p:sp>
-        <p:nvSpPr>
-          <p:cNvPr id="6" name="TextBox 5"/>
+              <a:t>AB-2: Erst Struktur klären – dann moderieren</a:t>
+            </a:r>
+          </a:p>
+        </p:txBody>
+      </p:sp>
+      <p:sp>
+        <p:nvSpPr>
+          <p:cNvPr id="8" name="TextBox 7"/>
           <p:cNvSpPr txBox="1"/>
           <p:nvPr/>
         </p:nvSpPr>
         <p:spPr>
           <a:xfrm>
-            <a:off x="685800" y="4480560"/>
-            <a:ext cx="8653881" cy="1280160"/>
+            <a:off x="685800" y="1554480"/>
+            <a:ext cx="10817352" cy="3840480"/>
           </a:xfrm>
           <a:prstGeom prst="rect">
             <a:avLst/>
@@ -9528,29 +9707,233 @@
           </a:bodyPr>
           <a:lstStyle/>
           <a:p>
+            <a:pPr marL="190500" indent="-190500">
+              <a:spcBef>
+                <a:spcPts val="400"/>
+              </a:spcBef>
+              <a:spcAft>
+                <a:spcPts val="200"/>
+              </a:spcAft>
+            </a:pPr>
+            <a:r>
+              <a:rPr sz="1400">
+                <a:solidFill>
+                  <a:srgbClr val="3D5466"/>
+                </a:solidFill>
+                <a:latin typeface="Arial"/>
+              </a:rPr>
+              <a:t>▸  Vorschritt: Welche Strukturfrage muss vor dem Gespräch entschieden werden?</a:t>
+            </a:r>
+          </a:p>
+          <a:p>
+            <a:pPr marL="190500" indent="-190500">
+              <a:spcBef>
+                <a:spcPts val="400"/>
+              </a:spcBef>
+              <a:spcAft>
+                <a:spcPts val="200"/>
+              </a:spcAft>
+            </a:pPr>
+            <a:r>
+              <a:rPr sz="1400">
+                <a:solidFill>
+                  <a:srgbClr val="3D5466"/>
+                </a:solidFill>
+                <a:latin typeface="Arial"/>
+              </a:rPr>
+              <a:t>▸  Schritt 1: Konfliktart und Glasl-Stufe einordnen – mit Begründung.</a:t>
+            </a:r>
+          </a:p>
+          <a:p>
+            <a:pPr marL="190500" indent="-190500">
+              <a:spcBef>
+                <a:spcPts val="400"/>
+              </a:spcBef>
+              <a:spcAft>
+                <a:spcPts val="200"/>
+              </a:spcAft>
+            </a:pPr>
+            <a:r>
+              <a:rPr sz="1400">
+                <a:solidFill>
+                  <a:srgbClr val="3D5466"/>
+                </a:solidFill>
+                <a:latin typeface="Arial"/>
+              </a:rPr>
+              <a:t>▸  Schritt 2: Position vs. Interesse der Konfliktpartei herausarbeiten.</a:t>
+            </a:r>
+          </a:p>
+          <a:p>
+            <a:pPr marL="190500" indent="-190500">
+              <a:spcBef>
+                <a:spcPts val="400"/>
+              </a:spcBef>
+              <a:spcAft>
+                <a:spcPts val="200"/>
+              </a:spcAft>
+            </a:pPr>
+            <a:r>
+              <a:rPr sz="1400">
+                <a:solidFill>
+                  <a:srgbClr val="3D5466"/>
+                </a:solidFill>
+                <a:latin typeface="Arial"/>
+              </a:rPr>
+              <a:t>▸  Schritt 3: Allparteilichen Einstiegssatz formulieren.</a:t>
+            </a:r>
+          </a:p>
+          <a:p>
+            <a:pPr marL="190500" indent="-190500">
+              <a:spcBef>
+                <a:spcPts val="400"/>
+              </a:spcBef>
+              <a:spcAft>
+                <a:spcPts val="200"/>
+              </a:spcAft>
+            </a:pPr>
+            <a:r>
+              <a:rPr sz="1400">
+                <a:solidFill>
+                  <a:srgbClr val="3D5466"/>
+                </a:solidFill>
+                <a:latin typeface="Arial"/>
+              </a:rPr>
+              <a:t>▸  Sprachcheck: allparteilich oder Partei-ergreifend? Einladend oder defensiv?</a:t>
+            </a:r>
+          </a:p>
+        </p:txBody>
+      </p:sp>
+      <p:sp>
+        <p:nvSpPr>
+          <p:cNvPr id="9" name="Rectangle 8"/>
+          <p:cNvSpPr/>
+          <p:nvPr/>
+        </p:nvSpPr>
+        <p:spPr>
+          <a:xfrm>
+            <a:off x="685800" y="5486400"/>
+            <a:ext cx="10817352" cy="640080"/>
+          </a:xfrm>
+          <a:prstGeom prst="rect">
+            <a:avLst/>
+          </a:prstGeom>
+          <a:solidFill>
+            <a:srgbClr val="1F2C56"/>
+          </a:solidFill>
+          <a:ln>
+            <a:noFill/>
+          </a:ln>
+        </p:spPr>
+        <p:style>
+          <a:lnRef idx="1">
+            <a:schemeClr val="accent1"/>
+          </a:lnRef>
+          <a:fillRef idx="3">
+            <a:schemeClr val="accent1"/>
+          </a:fillRef>
+          <a:effectRef idx="2">
+            <a:schemeClr val="accent1"/>
+          </a:effectRef>
+          <a:fontRef idx="minor">
+            <a:schemeClr val="lt1"/>
+          </a:fontRef>
+        </p:style>
+        <p:txBody>
+          <a:bodyPr rtlCol="0" anchor="ctr"/>
+          <a:lstStyle/>
+          <a:p>
+            <a:pPr algn="ctr"/>
+          </a:p>
+        </p:txBody>
+      </p:sp>
+      <p:sp>
+        <p:nvSpPr>
+          <p:cNvPr id="10" name="TextBox 9"/>
+          <p:cNvSpPr txBox="1"/>
+          <p:nvPr/>
+        </p:nvSpPr>
+        <p:spPr>
+          <a:xfrm>
+            <a:off x="868680" y="5596128"/>
+            <a:ext cx="10451592" cy="457200"/>
+          </a:xfrm>
+          <a:prstGeom prst="rect">
+            <a:avLst/>
+          </a:prstGeom>
+          <a:noFill/>
+        </p:spPr>
+        <p:txBody>
+          <a:bodyPr wrap="square">
+            <a:spAutoFit/>
+          </a:bodyPr>
+          <a:lstStyle/>
+          <a:p>
             <a:pPr algn="l"/>
             <a:r>
-              <a:rPr sz="1600" b="0" i="0">
-                <a:solidFill>
-                  <a:srgbClr val="C8D2E6"/>
+              <a:rPr sz="1300" b="1" i="0">
+                <a:solidFill>
+                  <a:srgbClr val="FFFFFF"/>
                 </a:solidFill>
                 <a:latin typeface="Arial"/>
               </a:rPr>
-              <a:t>Drei Transferaufgaben – Greenleaf-Test – Brücke TL10</a:t>
-            </a:r>
-          </a:p>
-        </p:txBody>
-      </p:sp>
-      <p:sp>
-        <p:nvSpPr>
-          <p:cNvPr id="7" name="TextBox 6"/>
+              <a:t>→  Bearbeitung im Teilnehmer-Workbook (Arbeitsblatt mit Ausfüllfeldern)</a:t>
+            </a:r>
+          </a:p>
+        </p:txBody>
+      </p:sp>
+      <p:sp>
+        <p:nvSpPr>
+          <p:cNvPr id="11" name="Rectangle 10"/>
+          <p:cNvSpPr/>
+          <p:nvPr/>
+        </p:nvSpPr>
+        <p:spPr>
+          <a:xfrm>
+            <a:off x="0" y="6510528"/>
+            <a:ext cx="12188952" cy="347472"/>
+          </a:xfrm>
+          <a:prstGeom prst="rect">
+            <a:avLst/>
+          </a:prstGeom>
+          <a:solidFill>
+            <a:srgbClr val="0A1937"/>
+          </a:solidFill>
+          <a:ln>
+            <a:noFill/>
+          </a:ln>
+        </p:spPr>
+        <p:style>
+          <a:lnRef idx="1">
+            <a:schemeClr val="accent1"/>
+          </a:lnRef>
+          <a:fillRef idx="3">
+            <a:schemeClr val="accent1"/>
+          </a:fillRef>
+          <a:effectRef idx="2">
+            <a:schemeClr val="accent1"/>
+          </a:effectRef>
+          <a:fontRef idx="minor">
+            <a:schemeClr val="lt1"/>
+          </a:fontRef>
+        </p:style>
+        <p:txBody>
+          <a:bodyPr rtlCol="0" anchor="ctr"/>
+          <a:lstStyle/>
+          <a:p>
+            <a:pPr algn="ctr"/>
+          </a:p>
+        </p:txBody>
+      </p:sp>
+      <p:sp>
+        <p:nvSpPr>
+          <p:cNvPr id="12" name="TextBox 11"/>
           <p:cNvSpPr txBox="1"/>
           <p:nvPr/>
         </p:nvSpPr>
         <p:spPr>
           <a:xfrm>
-            <a:off x="685800" y="6355080"/>
-            <a:ext cx="10817352" cy="274320"/>
+            <a:off x="685800" y="6583680"/>
+            <a:ext cx="6490411" cy="256032"/>
           </a:xfrm>
           <a:prstGeom prst="rect">
             <a:avLst/>
@@ -9567,7 +9950,7 @@
             <a:r>
               <a:rPr sz="700">
                 <a:solidFill>
-                  <a:srgbClr val="8CA0C3"/>
+                  <a:srgbClr val="A0B4D2"/>
                 </a:solidFill>
                 <a:latin typeface="Consolas"/>
               </a:rPr>
@@ -9609,7 +9992,7 @@
             <a:avLst/>
           </a:prstGeom>
           <a:solidFill>
-            <a:srgbClr val="EDEDF3"/>
+            <a:srgbClr val="1F2C56"/>
           </a:solidFill>
           <a:ln>
             <a:noFill/>
@@ -9639,57 +10022,14 @@
       </p:sp>
       <p:sp>
         <p:nvSpPr>
-          <p:cNvPr id="3" name="Rectangle 2"/>
-          <p:cNvSpPr/>
-          <p:nvPr/>
-        </p:nvSpPr>
-        <p:spPr>
-          <a:xfrm>
-            <a:off x="0" y="0"/>
-            <a:ext cx="12188952" cy="50292"/>
-          </a:xfrm>
-          <a:prstGeom prst="rect">
-            <a:avLst/>
-          </a:prstGeom>
-          <a:solidFill>
-            <a:srgbClr val="1F2C56"/>
-          </a:solidFill>
-          <a:ln>
-            <a:noFill/>
-          </a:ln>
-        </p:spPr>
-        <p:style>
-          <a:lnRef idx="1">
-            <a:schemeClr val="accent1"/>
-          </a:lnRef>
-          <a:fillRef idx="3">
-            <a:schemeClr val="accent1"/>
-          </a:fillRef>
-          <a:effectRef idx="2">
-            <a:schemeClr val="accent1"/>
-          </a:effectRef>
-          <a:fontRef idx="minor">
-            <a:schemeClr val="lt1"/>
-          </a:fontRef>
-        </p:style>
-        <p:txBody>
-          <a:bodyPr rtlCol="0" anchor="ctr"/>
-          <a:lstStyle/>
-          <a:p>
-            <a:pPr algn="ctr"/>
-          </a:p>
-        </p:txBody>
-      </p:sp>
-      <p:sp>
-        <p:nvSpPr>
-          <p:cNvPr id="4" name="TextBox 3"/>
+          <p:cNvPr id="3" name="TextBox 2"/>
           <p:cNvSpPr txBox="1"/>
           <p:nvPr/>
         </p:nvSpPr>
         <p:spPr>
           <a:xfrm>
-            <a:off x="685800" y="109728"/>
-            <a:ext cx="10817352" cy="228600"/>
+            <a:off x="685800" y="2377440"/>
+            <a:ext cx="10817352" cy="365760"/>
           </a:xfrm>
           <a:prstGeom prst="rect">
             <a:avLst/>
@@ -9704,70 +10044,27 @@
           <a:p>
             <a:pPr algn="l"/>
             <a:r>
-              <a:rPr sz="750">
-                <a:solidFill>
-                  <a:srgbClr val="78808C"/>
+              <a:rPr sz="1200">
+                <a:solidFill>
+                  <a:srgbClr val="D9C089"/>
                 </a:solidFill>
                 <a:latin typeface="Consolas"/>
               </a:rPr>
-              <a:t>TL08  ·  INHALT</a:t>
-            </a:r>
-          </a:p>
-        </p:txBody>
-      </p:sp>
-      <p:sp>
-        <p:nvSpPr>
-          <p:cNvPr id="5" name="Rectangle 4"/>
+              <a:t>ABSCHLUSS</a:t>
+            </a:r>
+          </a:p>
+        </p:txBody>
+      </p:sp>
+      <p:sp>
+        <p:nvSpPr>
+          <p:cNvPr id="4" name="Rectangle 3"/>
           <p:cNvSpPr/>
           <p:nvPr/>
         </p:nvSpPr>
         <p:spPr>
           <a:xfrm>
-            <a:off x="0" y="1234440"/>
-            <a:ext cx="12188952" cy="12700"/>
-          </a:xfrm>
-          <a:prstGeom prst="rect">
-            <a:avLst/>
-          </a:prstGeom>
-          <a:solidFill>
-            <a:srgbClr val="D8DFE4"/>
-          </a:solidFill>
-          <a:ln>
-            <a:noFill/>
-          </a:ln>
-        </p:spPr>
-        <p:style>
-          <a:lnRef idx="1">
-            <a:schemeClr val="accent1"/>
-          </a:lnRef>
-          <a:fillRef idx="3">
-            <a:schemeClr val="accent1"/>
-          </a:fillRef>
-          <a:effectRef idx="2">
-            <a:schemeClr val="accent1"/>
-          </a:effectRef>
-          <a:fontRef idx="minor">
-            <a:schemeClr val="lt1"/>
-          </a:fontRef>
-        </p:style>
-        <p:txBody>
-          <a:bodyPr rtlCol="0" anchor="ctr"/>
-          <a:lstStyle/>
-          <a:p>
-            <a:pPr algn="ctr"/>
-          </a:p>
-        </p:txBody>
-      </p:sp>
-      <p:sp>
-        <p:nvSpPr>
-          <p:cNvPr id="6" name="Rectangle 5"/>
-          <p:cNvSpPr/>
-          <p:nvPr/>
-        </p:nvSpPr>
-        <p:spPr>
-          <a:xfrm>
-            <a:off x="685800" y="502920"/>
-            <a:ext cx="36576" cy="658368"/>
+            <a:off x="685800" y="2788920"/>
+            <a:ext cx="548640" cy="38100"/>
           </a:xfrm>
           <a:prstGeom prst="rect">
             <a:avLst/>
@@ -9803,14 +10100,14 @@
       </p:sp>
       <p:sp>
         <p:nvSpPr>
-          <p:cNvPr id="7" name="TextBox 6"/>
+          <p:cNvPr id="5" name="TextBox 4"/>
           <p:cNvSpPr txBox="1"/>
           <p:nvPr/>
         </p:nvSpPr>
         <p:spPr>
           <a:xfrm>
-            <a:off x="813816" y="502920"/>
-            <a:ext cx="10634472" cy="685800"/>
+            <a:off x="685800" y="3017520"/>
+            <a:ext cx="10817352" cy="1463040"/>
           </a:xfrm>
           <a:prstGeom prst="rect">
             <a:avLst/>
@@ -9825,27 +10122,27 @@
           <a:p>
             <a:pPr algn="l"/>
             <a:r>
-              <a:rPr sz="2400" b="1" i="0">
-                <a:solidFill>
-                  <a:srgbClr val="1F2C56"/>
+              <a:rPr sz="4000" b="1" i="0">
+                <a:solidFill>
+                  <a:srgbClr val="FFFFFF"/>
                 </a:solidFill>
                 <a:latin typeface="Arial"/>
               </a:rPr>
-              <a:t>Drei Transferaufgaben für die nächsten vier Wochen</a:t>
-            </a:r>
-          </a:p>
-        </p:txBody>
-      </p:sp>
-      <p:sp>
-        <p:nvSpPr>
-          <p:cNvPr id="8" name="TextBox 7"/>
+              <a:t>Transfer &amp; Haltung</a:t>
+            </a:r>
+          </a:p>
+        </p:txBody>
+      </p:sp>
+      <p:sp>
+        <p:nvSpPr>
+          <p:cNvPr id="6" name="TextBox 5"/>
           <p:cNvSpPr txBox="1"/>
           <p:nvPr/>
         </p:nvSpPr>
         <p:spPr>
           <a:xfrm>
-            <a:off x="685800" y="1417320"/>
-            <a:ext cx="10817352" cy="4892040"/>
+            <a:off x="685800" y="4480560"/>
+            <a:ext cx="8653881" cy="1280160"/>
           </a:xfrm>
           <a:prstGeom prst="rect">
             <a:avLst/>
@@ -9853,122 +10150,34 @@
           <a:noFill/>
         </p:spPr>
         <p:txBody>
-          <a:bodyPr wrap="square" anchor="ctr">
+          <a:bodyPr wrap="square">
             <a:spAutoFit/>
           </a:bodyPr>
           <a:lstStyle/>
           <a:p>
-            <a:pPr marL="190500" indent="-190500">
-              <a:spcBef>
-                <a:spcPts val="400"/>
-              </a:spcBef>
-              <a:spcAft>
-                <a:spcPts val="200"/>
-              </a:spcAft>
-            </a:pPr>
-            <a:r>
-              <a:rPr sz="1300">
-                <a:solidFill>
-                  <a:srgbClr val="3D5466"/>
+            <a:pPr algn="l"/>
+            <a:r>
+              <a:rPr sz="1600" b="0" i="0">
+                <a:solidFill>
+                  <a:srgbClr val="C8D2E6"/>
                 </a:solidFill>
                 <a:latin typeface="Arial"/>
               </a:rPr>
-              <a:t>▸  1: Bestandsaufnahme – welches Gespräch fehlte, was hat es gekostet?</a:t>
-            </a:r>
-          </a:p>
-          <a:p>
-            <a:pPr marL="190500" indent="-190500">
-              <a:spcBef>
-                <a:spcPts val="400"/>
-              </a:spcBef>
-              <a:spcAft>
-                <a:spcPts val="200"/>
-              </a:spcAft>
-            </a:pPr>
-            <a:r>
-              <a:rPr sz="1300">
-                <a:solidFill>
-                  <a:srgbClr val="3D5466"/>
-                </a:solidFill>
-                <a:latin typeface="Arial"/>
-              </a:rPr>
-              <a:t>▸  2: Ein schwieriges Gespräch führen – AB-1 vorher schriftlich ausfüllen.</a:t>
-            </a:r>
-          </a:p>
-          <a:p>
-            <a:pPr marL="190500" indent="-190500">
-              <a:spcBef>
-                <a:spcPts val="400"/>
-              </a:spcBef>
-              <a:spcAft>
-                <a:spcPts val="200"/>
-              </a:spcAft>
-            </a:pPr>
-            <a:r>
-              <a:rPr sz="1300">
-                <a:solidFill>
-                  <a:srgbClr val="3D5466"/>
-                </a:solidFill>
-                <a:latin typeface="Arial"/>
-              </a:rPr>
-              <a:t>▸  3: Aktuellen Konflikt nach Glasl einordnen – als Fallberatungsfall mitbringen.</a:t>
-            </a:r>
-          </a:p>
-        </p:txBody>
-      </p:sp>
-      <p:sp>
-        <p:nvSpPr>
-          <p:cNvPr id="9" name="Rectangle 8"/>
-          <p:cNvSpPr/>
-          <p:nvPr/>
-        </p:nvSpPr>
-        <p:spPr>
-          <a:xfrm>
-            <a:off x="0" y="6510528"/>
-            <a:ext cx="12188952" cy="347472"/>
-          </a:xfrm>
-          <a:prstGeom prst="rect">
-            <a:avLst/>
-          </a:prstGeom>
-          <a:solidFill>
-            <a:srgbClr val="0A1937"/>
-          </a:solidFill>
-          <a:ln>
-            <a:noFill/>
-          </a:ln>
-        </p:spPr>
-        <p:style>
-          <a:lnRef idx="1">
-            <a:schemeClr val="accent1"/>
-          </a:lnRef>
-          <a:fillRef idx="3">
-            <a:schemeClr val="accent1"/>
-          </a:fillRef>
-          <a:effectRef idx="2">
-            <a:schemeClr val="accent1"/>
-          </a:effectRef>
-          <a:fontRef idx="minor">
-            <a:schemeClr val="lt1"/>
-          </a:fontRef>
-        </p:style>
-        <p:txBody>
-          <a:bodyPr rtlCol="0" anchor="ctr"/>
-          <a:lstStyle/>
-          <a:p>
-            <a:pPr algn="ctr"/>
-          </a:p>
-        </p:txBody>
-      </p:sp>
-      <p:sp>
-        <p:nvSpPr>
-          <p:cNvPr id="10" name="TextBox 9"/>
+              <a:t>Drei Transferaufgaben – Greenleaf-Test – Brücke TL10</a:t>
+            </a:r>
+          </a:p>
+        </p:txBody>
+      </p:sp>
+      <p:sp>
+        <p:nvSpPr>
+          <p:cNvPr id="7" name="TextBox 6"/>
           <p:cNvSpPr txBox="1"/>
           <p:nvPr/>
         </p:nvSpPr>
         <p:spPr>
           <a:xfrm>
-            <a:off x="685800" y="6583680"/>
-            <a:ext cx="6490411" cy="256032"/>
+            <a:off x="685800" y="6355080"/>
+            <a:ext cx="10817352" cy="274320"/>
           </a:xfrm>
           <a:prstGeom prst="rect">
             <a:avLst/>
@@ -9985,7 +10194,7 @@
             <a:r>
               <a:rPr sz="700">
                 <a:solidFill>
-                  <a:srgbClr val="A0B4D2"/>
+                  <a:srgbClr val="8CA0C3"/>
                 </a:solidFill>
                 <a:latin typeface="Consolas"/>
               </a:rPr>
@@ -10003,6 +10212,424 @@
 </file>
 
 <file path=ppt/slides/slide23.xml><?xml version="1.0" encoding="utf-8"?>
+<p:sld xmlns:a="http://schemas.openxmlformats.org/drawingml/2006/main" xmlns:p="http://schemas.openxmlformats.org/presentationml/2006/main" xmlns:r="http://schemas.openxmlformats.org/officeDocument/2006/relationships">
+  <p:cSld>
+    <p:spTree>
+      <p:nvGrpSpPr>
+        <p:cNvPr id="1" name=""/>
+        <p:cNvGrpSpPr/>
+        <p:nvPr/>
+      </p:nvGrpSpPr>
+      <p:grpSpPr/>
+      <p:sp>
+        <p:nvSpPr>
+          <p:cNvPr id="2" name="Rectangle 1"/>
+          <p:cNvSpPr/>
+          <p:nvPr/>
+        </p:nvSpPr>
+        <p:spPr>
+          <a:xfrm>
+            <a:off x="0" y="0"/>
+            <a:ext cx="12188952" cy="6858000"/>
+          </a:xfrm>
+          <a:prstGeom prst="rect">
+            <a:avLst/>
+          </a:prstGeom>
+          <a:solidFill>
+            <a:srgbClr val="EDEDF3"/>
+          </a:solidFill>
+          <a:ln>
+            <a:noFill/>
+          </a:ln>
+        </p:spPr>
+        <p:style>
+          <a:lnRef idx="1">
+            <a:schemeClr val="accent1"/>
+          </a:lnRef>
+          <a:fillRef idx="3">
+            <a:schemeClr val="accent1"/>
+          </a:fillRef>
+          <a:effectRef idx="2">
+            <a:schemeClr val="accent1"/>
+          </a:effectRef>
+          <a:fontRef idx="minor">
+            <a:schemeClr val="lt1"/>
+          </a:fontRef>
+        </p:style>
+        <p:txBody>
+          <a:bodyPr rtlCol="0" anchor="ctr"/>
+          <a:lstStyle/>
+          <a:p>
+            <a:pPr algn="ctr"/>
+          </a:p>
+        </p:txBody>
+      </p:sp>
+      <p:sp>
+        <p:nvSpPr>
+          <p:cNvPr id="3" name="Rectangle 2"/>
+          <p:cNvSpPr/>
+          <p:nvPr/>
+        </p:nvSpPr>
+        <p:spPr>
+          <a:xfrm>
+            <a:off x="0" y="0"/>
+            <a:ext cx="12188952" cy="50292"/>
+          </a:xfrm>
+          <a:prstGeom prst="rect">
+            <a:avLst/>
+          </a:prstGeom>
+          <a:solidFill>
+            <a:srgbClr val="1F2C56"/>
+          </a:solidFill>
+          <a:ln>
+            <a:noFill/>
+          </a:ln>
+        </p:spPr>
+        <p:style>
+          <a:lnRef idx="1">
+            <a:schemeClr val="accent1"/>
+          </a:lnRef>
+          <a:fillRef idx="3">
+            <a:schemeClr val="accent1"/>
+          </a:fillRef>
+          <a:effectRef idx="2">
+            <a:schemeClr val="accent1"/>
+          </a:effectRef>
+          <a:fontRef idx="minor">
+            <a:schemeClr val="lt1"/>
+          </a:fontRef>
+        </p:style>
+        <p:txBody>
+          <a:bodyPr rtlCol="0" anchor="ctr"/>
+          <a:lstStyle/>
+          <a:p>
+            <a:pPr algn="ctr"/>
+          </a:p>
+        </p:txBody>
+      </p:sp>
+      <p:sp>
+        <p:nvSpPr>
+          <p:cNvPr id="4" name="TextBox 3"/>
+          <p:cNvSpPr txBox="1"/>
+          <p:nvPr/>
+        </p:nvSpPr>
+        <p:spPr>
+          <a:xfrm>
+            <a:off x="685800" y="109728"/>
+            <a:ext cx="10817352" cy="228600"/>
+          </a:xfrm>
+          <a:prstGeom prst="rect">
+            <a:avLst/>
+          </a:prstGeom>
+          <a:noFill/>
+        </p:spPr>
+        <p:txBody>
+          <a:bodyPr wrap="none">
+            <a:spAutoFit/>
+          </a:bodyPr>
+          <a:lstStyle/>
+          <a:p>
+            <a:pPr algn="l"/>
+            <a:r>
+              <a:rPr sz="750">
+                <a:solidFill>
+                  <a:srgbClr val="78808C"/>
+                </a:solidFill>
+                <a:latin typeface="Consolas"/>
+              </a:rPr>
+              <a:t>TL08  ·  INHALT</a:t>
+            </a:r>
+          </a:p>
+        </p:txBody>
+      </p:sp>
+      <p:sp>
+        <p:nvSpPr>
+          <p:cNvPr id="5" name="Rectangle 4"/>
+          <p:cNvSpPr/>
+          <p:nvPr/>
+        </p:nvSpPr>
+        <p:spPr>
+          <a:xfrm>
+            <a:off x="0" y="1234440"/>
+            <a:ext cx="12188952" cy="12700"/>
+          </a:xfrm>
+          <a:prstGeom prst="rect">
+            <a:avLst/>
+          </a:prstGeom>
+          <a:solidFill>
+            <a:srgbClr val="D8DFE4"/>
+          </a:solidFill>
+          <a:ln>
+            <a:noFill/>
+          </a:ln>
+        </p:spPr>
+        <p:style>
+          <a:lnRef idx="1">
+            <a:schemeClr val="accent1"/>
+          </a:lnRef>
+          <a:fillRef idx="3">
+            <a:schemeClr val="accent1"/>
+          </a:fillRef>
+          <a:effectRef idx="2">
+            <a:schemeClr val="accent1"/>
+          </a:effectRef>
+          <a:fontRef idx="minor">
+            <a:schemeClr val="lt1"/>
+          </a:fontRef>
+        </p:style>
+        <p:txBody>
+          <a:bodyPr rtlCol="0" anchor="ctr"/>
+          <a:lstStyle/>
+          <a:p>
+            <a:pPr algn="ctr"/>
+          </a:p>
+        </p:txBody>
+      </p:sp>
+      <p:sp>
+        <p:nvSpPr>
+          <p:cNvPr id="6" name="Rectangle 5"/>
+          <p:cNvSpPr/>
+          <p:nvPr/>
+        </p:nvSpPr>
+        <p:spPr>
+          <a:xfrm>
+            <a:off x="685800" y="502920"/>
+            <a:ext cx="36576" cy="658368"/>
+          </a:xfrm>
+          <a:prstGeom prst="rect">
+            <a:avLst/>
+          </a:prstGeom>
+          <a:solidFill>
+            <a:srgbClr val="D9C089"/>
+          </a:solidFill>
+          <a:ln>
+            <a:noFill/>
+          </a:ln>
+        </p:spPr>
+        <p:style>
+          <a:lnRef idx="1">
+            <a:schemeClr val="accent1"/>
+          </a:lnRef>
+          <a:fillRef idx="3">
+            <a:schemeClr val="accent1"/>
+          </a:fillRef>
+          <a:effectRef idx="2">
+            <a:schemeClr val="accent1"/>
+          </a:effectRef>
+          <a:fontRef idx="minor">
+            <a:schemeClr val="lt1"/>
+          </a:fontRef>
+        </p:style>
+        <p:txBody>
+          <a:bodyPr rtlCol="0" anchor="ctr"/>
+          <a:lstStyle/>
+          <a:p>
+            <a:pPr algn="ctr"/>
+          </a:p>
+        </p:txBody>
+      </p:sp>
+      <p:sp>
+        <p:nvSpPr>
+          <p:cNvPr id="7" name="TextBox 6"/>
+          <p:cNvSpPr txBox="1"/>
+          <p:nvPr/>
+        </p:nvSpPr>
+        <p:spPr>
+          <a:xfrm>
+            <a:off x="813816" y="502920"/>
+            <a:ext cx="10634472" cy="685800"/>
+          </a:xfrm>
+          <a:prstGeom prst="rect">
+            <a:avLst/>
+          </a:prstGeom>
+          <a:noFill/>
+        </p:spPr>
+        <p:txBody>
+          <a:bodyPr wrap="square">
+            <a:spAutoFit/>
+          </a:bodyPr>
+          <a:lstStyle/>
+          <a:p>
+            <a:pPr algn="l"/>
+            <a:r>
+              <a:rPr sz="2400" b="1" i="0">
+                <a:solidFill>
+                  <a:srgbClr val="1F2C56"/>
+                </a:solidFill>
+                <a:latin typeface="Arial"/>
+              </a:rPr>
+              <a:t>Drei Transferaufgaben für die nächsten vier Wochen</a:t>
+            </a:r>
+          </a:p>
+        </p:txBody>
+      </p:sp>
+      <p:sp>
+        <p:nvSpPr>
+          <p:cNvPr id="8" name="TextBox 7"/>
+          <p:cNvSpPr txBox="1"/>
+          <p:nvPr/>
+        </p:nvSpPr>
+        <p:spPr>
+          <a:xfrm>
+            <a:off x="685800" y="1417320"/>
+            <a:ext cx="10817352" cy="4892040"/>
+          </a:xfrm>
+          <a:prstGeom prst="rect">
+            <a:avLst/>
+          </a:prstGeom>
+          <a:noFill/>
+        </p:spPr>
+        <p:txBody>
+          <a:bodyPr wrap="square" anchor="ctr">
+            <a:spAutoFit/>
+          </a:bodyPr>
+          <a:lstStyle/>
+          <a:p>
+            <a:pPr marL="190500" indent="-190500">
+              <a:spcBef>
+                <a:spcPts val="400"/>
+              </a:spcBef>
+              <a:spcAft>
+                <a:spcPts val="200"/>
+              </a:spcAft>
+            </a:pPr>
+            <a:r>
+              <a:rPr sz="1300">
+                <a:solidFill>
+                  <a:srgbClr val="3D5466"/>
+                </a:solidFill>
+                <a:latin typeface="Arial"/>
+              </a:rPr>
+              <a:t>▸  1: Bestandsaufnahme – welches Gespräch fehlte, was hat es gekostet?</a:t>
+            </a:r>
+          </a:p>
+          <a:p>
+            <a:pPr marL="190500" indent="-190500">
+              <a:spcBef>
+                <a:spcPts val="400"/>
+              </a:spcBef>
+              <a:spcAft>
+                <a:spcPts val="200"/>
+              </a:spcAft>
+            </a:pPr>
+            <a:r>
+              <a:rPr sz="1300">
+                <a:solidFill>
+                  <a:srgbClr val="3D5466"/>
+                </a:solidFill>
+                <a:latin typeface="Arial"/>
+              </a:rPr>
+              <a:t>▸  2: Ein schwieriges Gespräch führen – AB-1 vorher schriftlich ausfüllen.</a:t>
+            </a:r>
+          </a:p>
+          <a:p>
+            <a:pPr marL="190500" indent="-190500">
+              <a:spcBef>
+                <a:spcPts val="400"/>
+              </a:spcBef>
+              <a:spcAft>
+                <a:spcPts val="200"/>
+              </a:spcAft>
+            </a:pPr>
+            <a:r>
+              <a:rPr sz="1300">
+                <a:solidFill>
+                  <a:srgbClr val="3D5466"/>
+                </a:solidFill>
+                <a:latin typeface="Arial"/>
+              </a:rPr>
+              <a:t>▸  3: Aktuellen Konflikt nach Glasl einordnen – als Fallberatungsfall mitbringen.</a:t>
+            </a:r>
+          </a:p>
+        </p:txBody>
+      </p:sp>
+      <p:sp>
+        <p:nvSpPr>
+          <p:cNvPr id="9" name="Rectangle 8"/>
+          <p:cNvSpPr/>
+          <p:nvPr/>
+        </p:nvSpPr>
+        <p:spPr>
+          <a:xfrm>
+            <a:off x="0" y="6510528"/>
+            <a:ext cx="12188952" cy="347472"/>
+          </a:xfrm>
+          <a:prstGeom prst="rect">
+            <a:avLst/>
+          </a:prstGeom>
+          <a:solidFill>
+            <a:srgbClr val="0A1937"/>
+          </a:solidFill>
+          <a:ln>
+            <a:noFill/>
+          </a:ln>
+        </p:spPr>
+        <p:style>
+          <a:lnRef idx="1">
+            <a:schemeClr val="accent1"/>
+          </a:lnRef>
+          <a:fillRef idx="3">
+            <a:schemeClr val="accent1"/>
+          </a:fillRef>
+          <a:effectRef idx="2">
+            <a:schemeClr val="accent1"/>
+          </a:effectRef>
+          <a:fontRef idx="minor">
+            <a:schemeClr val="lt1"/>
+          </a:fontRef>
+        </p:style>
+        <p:txBody>
+          <a:bodyPr rtlCol="0" anchor="ctr"/>
+          <a:lstStyle/>
+          <a:p>
+            <a:pPr algn="ctr"/>
+          </a:p>
+        </p:txBody>
+      </p:sp>
+      <p:sp>
+        <p:nvSpPr>
+          <p:cNvPr id="10" name="TextBox 9"/>
+          <p:cNvSpPr txBox="1"/>
+          <p:nvPr/>
+        </p:nvSpPr>
+        <p:spPr>
+          <a:xfrm>
+            <a:off x="685800" y="6583680"/>
+            <a:ext cx="6490411" cy="256032"/>
+          </a:xfrm>
+          <a:prstGeom prst="rect">
+            <a:avLst/>
+          </a:prstGeom>
+          <a:noFill/>
+        </p:spPr>
+        <p:txBody>
+          <a:bodyPr wrap="none">
+            <a:spAutoFit/>
+          </a:bodyPr>
+          <a:lstStyle/>
+          <a:p>
+            <a:pPr algn="l"/>
+            <a:r>
+              <a:rPr sz="700">
+                <a:solidFill>
+                  <a:srgbClr val="A0B4D2"/>
+                </a:solidFill>
+                <a:latin typeface="Consolas"/>
+              </a:rPr>
+              <a:t>FKB Campus  ·  TL08</a:t>
+            </a:r>
+          </a:p>
+        </p:txBody>
+      </p:sp>
+    </p:spTree>
+  </p:cSld>
+  <p:clrMapOvr>
+    <a:masterClrMapping/>
+  </p:clrMapOvr>
+</p:sld>
+</file>
+
+<file path=ppt/slides/slide24.xml><?xml version="1.0" encoding="utf-8"?>
 <p:sld xmlns:a="http://schemas.openxmlformats.org/drawingml/2006/main" xmlns:p="http://schemas.openxmlformats.org/presentationml/2006/main" xmlns:r="http://schemas.openxmlformats.org/officeDocument/2006/relationships">
   <p:cSld>
     <p:spTree>
